--- a/kundenliste/Top_Player_Power_Praesentation.pptx
+++ b/kundenliste/Top_Player_Power_Praesentation.pptx
@@ -24,6 +24,7 @@
     <p:sldId id="269" r:id="rId6"/>
     <p:sldId id="270" r:id="rId5"/>
     <p:sldId id="271" r:id="rId28"/>
+    <p:sldId id="272" r:id="rId29"/>
   </p:sldIdLst>
   <p:sldSz cx="12192000" cy="6858000"/>
   <p:notesSz cx="6858000" cy="9144000"/>
@@ -452,7 +453,7 @@
                   <c:v>Infrastruktur</c:v>
                 </c:pt>
                 <c:pt idx="2">
-                  <c:v>Netz / UW</c:v>
+                  <c:v>Netz / Energie</c:v>
                 </c:pt>
                 <c:pt idx="3">
                   <c:v>Spitäler</c:v>
@@ -482,7 +483,7 @@
                   <c:v>1702100.0</c:v>
                 </c:pt>
                 <c:pt idx="2">
-                  <c:v>313700.0</c:v>
+                  <c:v>1401400.0</c:v>
                 </c:pt>
                 <c:pt idx="3">
                   <c:v>332400.0</c:v>
@@ -491,7 +492,7 @@
                   <c:v>389400.0</c:v>
                 </c:pt>
                 <c:pt idx="5">
-                  <c:v>231700.0</c:v>
+                  <c:v>497900.0</c:v>
                 </c:pt>
                 <c:pt idx="6">
                   <c:v>549500.0</c:v>
@@ -556,7 +557,7 @@
                   <c:v>Infrastruktur</c:v>
                 </c:pt>
                 <c:pt idx="2">
-                  <c:v>Netz / UW</c:v>
+                  <c:v>Netz / Energie</c:v>
                 </c:pt>
                 <c:pt idx="3">
                   <c:v>Spitäler</c:v>
@@ -586,7 +587,7 @@
                   <c:v>248100.0</c:v>
                 </c:pt>
                 <c:pt idx="2">
-                  <c:v>55400.0</c:v>
+                  <c:v>185500.0</c:v>
                 </c:pt>
                 <c:pt idx="3">
                   <c:v>65100.0</c:v>
@@ -595,7 +596,7 @@
                   <c:v>69700.0</c:v>
                 </c:pt>
                 <c:pt idx="5">
-                  <c:v>24100.0</c:v>
+                  <c:v>59500.0</c:v>
                 </c:pt>
                 <c:pt idx="6">
                   <c:v>101400.0</c:v>
@@ -727,7 +728,7 @@
             <c:idx val="0"/>
             <c:spPr>
               <a:solidFill>
-                <a:srgbClr val="E00036"/>
+                <a:srgbClr val="58595B"/>
               </a:solidFill>
             </c:spPr>
           </c:dPt>
@@ -743,7 +744,7 @@
             <c:idx val="2"/>
             <c:spPr>
               <a:solidFill>
-                <a:srgbClr val="58595B"/>
+                <a:srgbClr val="E00036"/>
               </a:solidFill>
             </c:spPr>
           </c:dPt>
@@ -751,7 +752,7 @@
             <c:idx val="3"/>
             <c:spPr>
               <a:solidFill>
-                <a:srgbClr val="E00036"/>
+                <a:srgbClr val="58595B"/>
               </a:solidFill>
             </c:spPr>
           </c:dPt>
@@ -834,16 +835,16 @@
               <c:strCache>
                 <c:ptCount val="10"/>
                 <c:pt idx="0">
-                  <c:v>Green Metro-Campus Dielsdorf</c:v>
+                  <c:v>Burkhalter Gruppe (Rahmen)</c:v>
                 </c:pt>
                 <c:pt idx="1">
-                  <c:v>Burkhalter Gruppe (Rahmen)</c:v>
+                  <c:v>ETAVIS / VINCI Energies (Rahmen)</c:v>
                 </c:pt>
                 <c:pt idx="2">
-                  <c:v>ETAVIS / VINCI Energies (Rahmen)</c:v>
+                  <c:v>Vantage ZRH3 Volketswil</c:v>
                 </c:pt>
                 <c:pt idx="3">
-                  <c:v>Vantage ZRH3 Volketswil</c:v>
+                  <c:v>Paket Alpine Solar-Baustellen 2027</c:v>
                 </c:pt>
                 <c:pt idx="4">
                   <c:v>Pumpspeicherwerk Grimsel 4</c:v>
@@ -873,16 +874,16 @@
                 <c:formatCode>General</c:formatCode>
                 <c:ptCount val="10"/>
                 <c:pt idx="0">
-                  <c:v>23500.0</c:v>
+                  <c:v>25400.0</c:v>
                 </c:pt>
                 <c:pt idx="1">
-                  <c:v>25400.0</c:v>
+                  <c:v>27800.0</c:v>
                 </c:pt>
                 <c:pt idx="2">
-                  <c:v>27800.0</c:v>
+                  <c:v>28000.0</c:v>
                 </c:pt>
                 <c:pt idx="3">
-                  <c:v>28000.0</c:v>
+                  <c:v>32300.0</c:v>
                 </c:pt>
                 <c:pt idx="4">
                   <c:v>33100.0</c:v>
@@ -1389,7 +1390,7 @@
           </a:p>
           <a:p>
             <a:r>
-              <a:t>«Ich zeige euch 38 Projekte mit zusammen 5,3 Mio. CHF Mietpotenzial. Realistisch für 2027 sind CHF 735'100 CHF. Jede Zahl steckt in der Excel und rechnet mit unseren Sätzen neu.»</a:t>
+              <a:t>«Ich zeige euch 52 Projekte mit zusammen 6,6 Mio. CHF Mietpotenzial. Realistisch für 2027 sind CHF 900'600 CHF. Jede Zahl steckt in der Excel und rechnet mit unseren Sätzen neu.»</a:t>
             </a:r>
           </a:p>
           <a:p/>
@@ -1491,7 +1492,7 @@
           </a:p>
           <a:p>
             <a:r>
-              <a:t>Winter 2027 zuerst: Ski-WM und WEF. ESAF 2028 jetzt offerieren.</a:t>
+              <a:t>Viele vermieten Generatoren, kaum jemand liefert das komplette Commissioning-Paket.</a:t>
             </a:r>
           </a:p>
           <a:p/>
@@ -1502,7 +1503,7 @@
           </a:p>
           <a:p>
             <a:r>
-              <a:t>«Die Ski-WM in Crans-Montana ist die dringendste Chance, Beschaffung läuft jetzt, Unterlagen auf Französisch. WEF startet den Aufbau im Dezember. Die Sommer-Openairs bündeln wir als Saisonpaket.»</a:t>
+              <a:t>«Unser Unterschied: Lastbänke bis 6,25 MW, Commissioning Level 1 bis 5, BESS, Kühlung und Heizung aus einer Hand, mit der Aggreko-Flotte im Rücken.»</a:t>
             </a:r>
           </a:p>
           <a:p/>
@@ -1513,12 +1514,12 @@
           </a:p>
           <a:p>
             <a:r>
-              <a:t>F: Sind die Event-Grössen belegt?</a:t>
-            </a:r>
-          </a:p>
-          <a:p>
-            <a:r>
-              <a:t>A: Termine ja, die Leistungsgrössen sind Annahmen. Vor Offerte Bedarf beim OK abfragen.</a:t>
+              <a:t>F: Und Kummler+Matter?</a:t>
+            </a:r>
+          </a:p>
+          <a:p>
+            <a:r>
+              <a:t>A: Vermietet mobile Trafostationen: bei Netzprojekten Partner oder Wettbewerber, je nach Fall.</a:t>
             </a:r>
           </a:p>
           <a:p/>
@@ -1529,7 +1530,7 @@
           </a:p>
           <a:p>
             <a:r>
-              <a:t>WEF = World Economic Forum. FIS = Internationaler Skiverband. ESAF = Eidg. Schwing- und Älplerfest. OK = Organisationskomitee. BESS = Batteriespeicher.</a:t>
+              <a:t>L1-L5 = Commissioning-Stufen von Werksabnahme bis Gesamttest. Cat = Caterpillar. kVA = Scheinleistung.</a:t>
             </a:r>
           </a:p>
         </p:txBody>
@@ -1604,7 +1605,7 @@
           </a:p>
           <a:p>
             <a:r>
-              <a:t>Viele vermieten Generatoren, kaum jemand liefert das komplette Commissioning-Paket.</a:t>
+              <a:t>Oktober bis Januar: von der Liste zu den ersten Aufträgen.</a:t>
             </a:r>
           </a:p>
           <a:p/>
@@ -1615,7 +1616,7 @@
           </a:p>
           <a:p>
             <a:r>
-              <a:t>«Unser Unterschied: Lastbänke bis 6,25 MW, Commissioning Level 1 bis 5, BESS, Kühlung und Heizung aus einer Hand, mit der Aggreko-Flotte im Rücken.»</a:t>
+              <a:t>«Im Oktober die heissen Leads, im November die Rahmen mit den Installateur-Gruppen, im Dezember unsere Preise ins Modell und den CRM-Status eintragen, im Januar Review im Team.»</a:t>
             </a:r>
           </a:p>
           <a:p/>
@@ -1626,12 +1627,12 @@
           </a:p>
           <a:p>
             <a:r>
-              <a:t>F: Und Kummler+Matter?</a:t>
-            </a:r>
-          </a:p>
-          <a:p>
-            <a:r>
-              <a:t>A: Vermietet mobile Trafostationen: bei Netzprojekten Partner oder Wettbewerber, je nach Fall.</a:t>
+              <a:t>F: Wer macht was?</a:t>
+            </a:r>
+          </a:p>
+          <a:p>
+            <a:r>
+              <a:t>A: Vorschlag: Burak RZ und Netz, Mauro und Jörg Kanal-Partner und CRM-Abgleich, Roberto Review. Im Team festlegen.</a:t>
             </a:r>
           </a:p>
           <a:p/>
@@ -1642,7 +1643,7 @@
           </a:p>
           <a:p>
             <a:r>
-              <a:t>L1-L5 = Commissioning-Stufen von Werksabnahme bis Gesamttest. Cat = Caterpillar. kVA = Scheinleistung.</a:t>
+              <a:t>CRM = Kundendatenbank. RZ = Rechenzentrum. WEF = World Economic Forum.</a:t>
             </a:r>
           </a:p>
         </p:txBody>
@@ -1717,7 +1718,7 @@
           </a:p>
           <a:p>
             <a:r>
-              <a:t>Oktober bis Januar: von der Liste zu den ersten Aufträgen.</a:t>
+              <a:t>Rechenzentren wachsen schneller als das Stromnetz. Die Lücke füllen wir.</a:t>
             </a:r>
           </a:p>
           <a:p/>
@@ -1728,7 +1729,7 @@
           </a:p>
           <a:p>
             <a:r>
-              <a:t>«Im Oktober die heissen Leads, im November die Rahmen mit den Installateur-Gruppen, im Dezember unsere Preise ins Modell und den CRM-Status eintragen, im Januar Review im Team.»</a:t>
+              <a:t>«EKZ hat über 100 Anschlussanfragen von Rechenzentren. Die Gebäude stehen, bevor das Unterwerk fertig ist. Und jedes RZ muss vor dem Start unter Volllast getestet werden: Das ist unser Lastbank-Geschäft.»</a:t>
             </a:r>
           </a:p>
           <a:p/>
@@ -1739,12 +1740,22 @@
           </a:p>
           <a:p>
             <a:r>
-              <a:t>F: Wer macht was?</a:t>
-            </a:r>
-          </a:p>
-          <a:p>
-            <a:r>
-              <a:t>A: Vorschlag: Burak RZ und Netz, Mauro und Jörg Kanal-Partner und CRM-Abgleich, Roberto Review. Im Team festlegen.</a:t>
+              <a:t>F: Was ist ein IST konkret?</a:t>
+            </a:r>
+          </a:p>
+          <a:p>
+            <a:r>
+              <a:t>A: Integrated Systems Test: Strom, Kühlung und Notstrom laufen gemeinsam auf Design-Last, das Netz wird getrennt, Fehler werden simuliert. Typisch 4 bis 6 Wochen.</a:t>
+            </a:r>
+          </a:p>
+          <a:p>
+            <a:r>
+              <a:t>F: Wer bestellt die Lastbank?</a:t>
+            </a:r>
+          </a:p>
+          <a:p>
+            <a:r>
+              <a:t>A: Meist der Commissioning-Manager des Betreibers oder der GU, selten der Elektroinstallateur.</a:t>
             </a:r>
           </a:p>
           <a:p/>
@@ -1755,7 +1766,7 @@
           </a:p>
           <a:p>
             <a:r>
-              <a:t>CRM = Kundendatenbank. RZ = Rechenzentrum. WEF = World Economic Forum.</a:t>
+              <a:t>RZ = Rechenzentrum. UW = Unterwerk. BESS = Batteriespeicher. IST = Integrated Systems Test. MW = Megawatt (Wirkleistung). Vornetz = übergeordnetes Netz von Axpo/Swissgrid.</a:t>
             </a:r>
           </a:p>
         </p:txBody>
@@ -1830,7 +1841,7 @@
           </a:p>
           <a:p>
             <a:r>
-              <a:t>Rechenzentren wachsen schneller als das Stromnetz. Die Lücke füllen wir.</a:t>
+              <a:t>Fünf Produkte, jedes mit einem klaren Einsatzfeld.</a:t>
             </a:r>
           </a:p>
           <a:p/>
@@ -1841,7 +1852,7 @@
           </a:p>
           <a:p>
             <a:r>
-              <a:t>«EKZ hat über 100 Anschlussanfragen von Rechenzentren. Die Gebäude stehen, bevor das Unterwerk fertig ist. Und jedes RZ muss vor dem Start unter Volllast getestet werden: Das ist unser Lastbank-Geschäft.»</a:t>
+              <a:t>«Generator ist der Türöffner, Lastbank ist das RZ-Produkt, BESS gewinnt überall, wo es leise sein muss, der mobile Trafo ist das Netzprodukt. Den NEA-Test verkaufen wir an Spitäler, Industrie und Facility Manager.»</a:t>
             </a:r>
           </a:p>
           <a:p/>
@@ -1852,22 +1863,22 @@
           </a:p>
           <a:p>
             <a:r>
-              <a:t>F: Was ist ein IST konkret?</a:t>
-            </a:r>
-          </a:p>
-          <a:p>
-            <a:r>
-              <a:t>A: Integrated Systems Test: Strom, Kühlung und Notstrom laufen gemeinsam auf Design-Last, das Netz wird getrennt, Fehler werden simuliert. Typisch 4 bis 6 Wochen.</a:t>
-            </a:r>
-          </a:p>
-          <a:p>
-            <a:r>
-              <a:t>F: Wer bestellt die Lastbank?</a:t>
-            </a:r>
-          </a:p>
-          <a:p>
-            <a:r>
-              <a:t>A: Meist der Commissioning-Manager des Betreibers oder der GU, selten der Elektroinstallateur.</a:t>
+              <a:t>F: Trafos haben wir?</a:t>
+            </a:r>
+          </a:p>
+          <a:p>
+            <a:r>
+              <a:t>A: Bei MiT nicht belegt, über Aggreko verfügbar. Vor Zusage intern klären.</a:t>
+            </a:r>
+          </a:p>
+          <a:p>
+            <a:r>
+              <a:t>F: Prime oder Standby?</a:t>
+            </a:r>
+          </a:p>
+          <a:p>
+            <a:r>
+              <a:t>A: Bei jeder Generator-Anfrage klären: Prime = Dauerbetrieb, Standby = Notstrom mit begrenzten Stunden.</a:t>
             </a:r>
           </a:p>
           <a:p/>
@@ -1878,7 +1889,7 @@
           </a:p>
           <a:p>
             <a:r>
-              <a:t>RZ = Rechenzentrum. UW = Unterwerk. BESS = Batteriespeicher. IST = Integrated Systems Test. MW = Megawatt (Wirkleistung). Vornetz = übergeordnetes Netz von Axpo/Swissgrid.</a:t>
+              <a:t>kVA/MVA = Scheinleistung, kW/MW = Wirkleistung (bei cos phi 0,8: 1'000 kVA ≈ 800 kW). HVO = erneuerbarer Diesel. NEA = Netzersatzanlage. MS/NS = Mittel-/Niederspannung. BESS: immer nutzbare Kapazität (kWh) und C-Rate angeben, nicht Nennkapazität.</a:t>
             </a:r>
           </a:p>
         </p:txBody>
@@ -1953,7 +1964,7 @@
           </a:p>
           <a:p>
             <a:r>
-              <a:t>Fünf Produkte, jedes mit einem klaren Einsatzfeld.</a:t>
+              <a:t>Das sichere Volumen: lange Laufzeiten und fixe Termine.</a:t>
             </a:r>
           </a:p>
           <a:p/>
@@ -1964,7 +1975,7 @@
           </a:p>
           <a:p>
             <a:r>
-              <a:t>«Generator ist der Türöffner, Lastbank ist das RZ-Produkt, BESS gewinnt überall, wo es leise sein muss, der mobile Trafo ist das Netzprodukt. Den NEA-Test verkaufen wir an Spitäler, Industrie und Facility Manager.»</a:t>
+              <a:t>«Gotthard, Sisikon und Grimsel laufen das ganze Jahr. Bei KSA und Lonza sind die Termine 2027 fix. Bei ASTRA, SBB und USZ läuft es über öffentliche Ausschreibungen, also früh auf simap schauen.»</a:t>
             </a:r>
           </a:p>
           <a:p/>
@@ -1975,22 +1986,12 @@
           </a:p>
           <a:p>
             <a:r>
-              <a:t>F: Trafos haben wir?</a:t>
-            </a:r>
-          </a:p>
-          <a:p>
-            <a:r>
-              <a:t>A: Bei MiT nicht belegt, über Aggreko verfügbar. Vor Zusage intern klären.</a:t>
-            </a:r>
-          </a:p>
-          <a:p>
-            <a:r>
-              <a:t>F: Prime oder Standby?</a:t>
-            </a:r>
-          </a:p>
-          <a:p>
-            <a:r>
-              <a:t>A: Bei jeder Generator-Anfrage klären: Prime = Dauerbetrieb, Standby = Notstrom mit begrenzten Stunden.</a:t>
+              <a:t>F: Wie kommen wir an ASTRA-Aufträge?</a:t>
+            </a:r>
+          </a:p>
+          <a:p>
+            <a:r>
+              <a:t>A: Selten direkt. Meist über die Bau-ARGE, die den Zuschlag hat (z.B. Marti, Implenia/Frutiger).</a:t>
             </a:r>
           </a:p>
           <a:p/>
@@ -2001,7 +2002,7 @@
           </a:p>
           <a:p>
             <a:r>
-              <a:t>kVA/MVA = Scheinleistung, kW/MW = Wirkleistung (bei cos phi 0,8: 1'000 kVA ≈ 800 kW). HVO = erneuerbarer Diesel. NEA = Netzersatzanlage. MS/NS = Mittel-/Niederspannung. BESS: immer nutzbare Kapazität (kWh) und C-Rate angeben, nicht Nennkapazität.</a:t>
+              <a:t>ASTRA = Bundesamt für Strassen. ARGE = Arbeitsgemeinschaft. TU = Totalunternehmer. KWO = Kraftwerke Oberhasli. IVöB = öffentliches Beschaffungsrecht. simap = Ausschreibungsplattform.</a:t>
             </a:r>
           </a:p>
         </p:txBody>
@@ -2076,7 +2077,7 @@
           </a:p>
           <a:p>
             <a:r>
-              <a:t>Nachschlagen, nicht vortragen.</a:t>
+              <a:t>Netzumbau, Reservekraftwerke und alpine Solaranlagen: 2027 ist Bauzeit bei den EVU.</a:t>
             </a:r>
           </a:p>
           <a:p/>
@@ -2087,7 +2088,44 @@
           </a:p>
           <a:p>
             <a:r>
-              <a:t>Folie nur zeigen, wenn Fragen zu Kürzeln kommen.</a:t>
+              <a:t>«16 Netz- und Energieprojekte liegen über CHF 50'000. Am konkretesten: Poste Galmiz von Groupe E, UW Laax von Repower mit Skigebiet am Netz, die GETEC-Reservekraftwerke mit Lastbank-Abnahme Anfang 2027 und sechs alpine Solar-Baustellen ohne Netzanschluss.»</a:t>
+            </a:r>
+          </a:p>
+          <a:p/>
+          <a:p>
+            <a:r>
+              <a:t>WENN GEFRAGT WIRD</a:t>
+            </a:r>
+          </a:p>
+          <a:p>
+            <a:r>
+              <a:t>F: Warum KKW-Revisionen?</a:t>
+            </a:r>
+          </a:p>
+          <a:p>
+            <a:r>
+              <a:t>A: Jede Revision braucht Baustrom für Revisionsdörfer und Ersatz für Hilfssysteme. Termine 2027 noch nicht publiziert, Muster: Beznau März bis Mai und ab August, Leibstadt April/Mai, Gösgen Ende Mai. Nuklearbereich mit strengen Auflagen.</a:t>
+            </a:r>
+          </a:p>
+          <a:p>
+            <a:r>
+              <a:t>F: Wer bestellt bei Swissgrid?</a:t>
+            </a:r>
+          </a:p>
+          <a:p>
+            <a:r>
+              <a:t>A: Meist der Generalunternehmer des Unterwerks oder der Leitungsbauer, selten Swissgrid direkt.</a:t>
+            </a:r>
+          </a:p>
+          <a:p/>
+          <a:p>
+            <a:r>
+              <a:t>ABKÜRZUNGEN AUF DIESER FOLIE</a:t>
+            </a:r>
+          </a:p>
+          <a:p>
+            <a:r>
+              <a:t>UW = Unterwerk. GIS = gasisolierte Schaltanlage. HVO = erneuerbarer Diesel. KKW = Kernkraftwerk. IBN = Inbetriebnahme. Solar-Express = Förderprogramm des Bundes für alpine Solaranlagen.</a:t>
             </a:r>
           </a:p>
         </p:txBody>
@@ -2162,6 +2200,92 @@
           </a:p>
           <a:p>
             <a:r>
+              <a:t>Nachschlagen, nicht vortragen.</a:t>
+            </a:r>
+          </a:p>
+          <a:p/>
+          <a:p>
+            <a:r>
+              <a:t>SO SAGST DU ES</a:t>
+            </a:r>
+          </a:p>
+          <a:p>
+            <a:r>
+              <a:t>Folie nur zeigen, wenn Fragen zu Kürzeln kommen.</a:t>
+            </a:r>
+          </a:p>
+        </p:txBody>
+      </p:sp>
+      <p:sp>
+        <p:nvSpPr>
+          <p:cNvPr id="4" name="Slide Number Placeholder 3"/>
+          <p:cNvSpPr>
+            <a:spLocks noGrp="1"/>
+          </p:cNvSpPr>
+          <p:nvPr>
+            <p:ph type="sldNum" idx="5" sz="quarter"/>
+          </p:nvPr>
+        </p:nvSpPr>
+        <p:spPr/>
+      </p:sp>
+    </p:spTree>
+  </p:cSld>
+  <p:clrMapOvr>
+    <a:masterClrMapping/>
+  </p:clrMapOvr>
+</p:notes>
+</file>
+
+<file path=ppt/notesSlides/notesSlide17.xml><?xml version="1.0" encoding="utf-8"?>
+<p:notes xmlns:a="http://schemas.openxmlformats.org/drawingml/2006/main" xmlns:p="http://schemas.openxmlformats.org/presentationml/2006/main" xmlns:r="http://schemas.openxmlformats.org/officeDocument/2006/relationships">
+  <p:cSld>
+    <p:spTree>
+      <p:nvGrpSpPr>
+        <p:cNvPr id="1" name=""/>
+        <p:cNvGrpSpPr/>
+        <p:nvPr/>
+      </p:nvGrpSpPr>
+      <p:grpSpPr>
+        <a:xfrm>
+          <a:off x="0" y="0"/>
+          <a:ext cx="0" cy="0"/>
+          <a:chOff x="0" y="0"/>
+          <a:chExt cx="0" cy="0"/>
+        </a:xfrm>
+      </p:grpSpPr>
+      <p:sp>
+        <p:nvSpPr>
+          <p:cNvPr id="2" name="Slide Image Placeholder 1"/>
+          <p:cNvSpPr>
+            <a:spLocks noGrp="1"/>
+          </p:cNvSpPr>
+          <p:nvPr>
+            <p:ph type="sldImg" idx="2"/>
+          </p:nvPr>
+        </p:nvSpPr>
+        <p:spPr/>
+      </p:sp>
+      <p:sp>
+        <p:nvSpPr>
+          <p:cNvPr id="3" name="Notes Placeholder 2"/>
+          <p:cNvSpPr>
+            <a:spLocks noGrp="1"/>
+          </p:cNvSpPr>
+          <p:nvPr>
+            <p:ph type="body" idx="3" sz="quarter"/>
+          </p:nvPr>
+        </p:nvSpPr>
+        <p:spPr/>
+        <p:txBody>
+          <a:bodyPr/>
+          <a:lstStyle/>
+          <a:p>
+            <a:r>
+              <a:t>BOTSCHAFT</a:t>
+            </a:r>
+          </a:p>
+          <a:p>
+            <a:r>
               <a:t>Rechenzentren früh im Bau besetzen, nicht erst beim Test.</a:t>
             </a:r>
           </a:p>
@@ -2270,7 +2394,7 @@
           </a:p>
           <a:p>
             <a:r>
-              <a:t>«Erwartung heisst: Potenzial mal Anteil, der 2027 anfällt, mal unsere Gewinnchance. 9 Projekte liegen über CHF 25'000 Erwartung, das ist Prio A.»</a:t>
+              <a:t>«Erwartung heisst: Potenzial mal Anteil, der 2027 anfällt, mal unsere Gewinnchance. 10 Projekte liegen über CHF 25'000 Erwartung, das ist Prio A.»</a:t>
             </a:r>
           </a:p>
           <a:p/>
@@ -2618,7 +2742,7 @@
           </a:p>
           <a:p>
             <a:r>
-              <a:t>Die Top 10 machen 52 % der Erwartung aus. Dort zuerst.</a:t>
+              <a:t>Die Top 10 machen 43 % der Erwartung aus. Dort zuerst.</a:t>
             </a:r>
           </a:p>
           <a:p/>
@@ -3064,7 +3188,7 @@
           </a:p>
           <a:p>
             <a:r>
-              <a:t>Das sichere Volumen: lange Laufzeiten und fixe Termine.</a:t>
+              <a:t>Einzelne Events sind zu klein, als Saisonpaket werden sie interessant.</a:t>
             </a:r>
           </a:p>
           <a:p/>
@@ -3075,7 +3199,7 @@
           </a:p>
           <a:p>
             <a:r>
-              <a:t>«Gotthard, Sisikon und Grimsel laufen das ganze Jahr. Bei KSA, Axpo Niederurnen und CKW sind die Termine 2027 fix. Bei ASTRA, SBB, ewz und USZ läuft es über öffentliche Ausschreibungen, also früh auf simap schauen.»</a:t>
+              <a:t>«Wir haben 56 Anlässe für 2026/27 gesammelt. Einzeln liegen fast alle unter CHF 50'000, weil sie nur Tage dauern. Gebündelt als Sommer-Festivals, Sport-Grossanlässe oder Märkte mit Zirkus Knie lohnt es sich. Dringend: Ski-WM, WEF und der neue Weihnachtsmarkt Bellevue Noël in Zürich.»</a:t>
             </a:r>
           </a:p>
           <a:p/>
@@ -3086,12 +3210,22 @@
           </a:p>
           <a:p>
             <a:r>
-              <a:t>F: Wie kommen wir an ASTRA-Aufträge?</a:t>
-            </a:r>
-          </a:p>
-          <a:p>
-            <a:r>
-              <a:t>A: Selten direkt. Meist über die Bau-ARGE, die den Zuschlag hat (z.B. Marti, Implenia/Frutiger).</a:t>
+              <a:t>F: Sind die Event-Grössen belegt?</a:t>
+            </a:r>
+          </a:p>
+          <a:p>
+            <a:r>
+              <a:t>A: Termine ja, die Leistungsgrössen sind Annahmen. Vor Offerte Bedarf beim OK abfragen.</a:t>
+            </a:r>
+          </a:p>
+          <a:p>
+            <a:r>
+              <a:t>F: Was ist mit der Ruder-WM Luzern?</a:t>
+            </a:r>
+          </a:p>
+          <a:p>
+            <a:r>
+              <a:t>A: 23. bis 29.08.2027, über 40'000 Zuschauer, TV-Compound mit Redundanz: das grösste Einzelevent im Paket Sport.</a:t>
             </a:r>
           </a:p>
           <a:p/>
@@ -3102,7 +3236,7 @@
           </a:p>
           <a:p>
             <a:r>
-              <a:t>ASTRA = Bundesamt für Strassen. ARGE = Arbeitsgemeinschaft. TU = Totalunternehmer. KWO = Kraftwerke Oberhasli. UW = Unterwerk. GIS = gasisolierte Schaltanlage. IVöB = öffentliches Beschaffungsrecht. simap = Ausschreibungsplattform.</a:t>
+              <a:t>WEF = World Economic Forum. FIS = Internationaler Skiverband. ESAF = Eidg. Schwing- und Älplerfest. OK = Organisationskomitee. BESS = Batteriespeicher.</a:t>
             </a:r>
           </a:p>
         </p:txBody>
@@ -8295,7 +8429,7 @@
                 </a:solidFill>
                 <a:latin typeface="Alata"/>
               </a:rPr>
-              <a:t>5,3 Mio.</a:t>
+              <a:t>6,6 Mio.</a:t>
             </a:r>
           </a:p>
           <a:p>
@@ -8339,7 +8473,7 @@
                 </a:solidFill>
                 <a:latin typeface="Alata"/>
               </a:rPr>
-              <a:t>0,74 Mio.</a:t>
+              <a:t>0,90 Mio.</a:t>
             </a:r>
           </a:p>
           <a:p>
@@ -9465,7 +9599,7 @@
                 </a:solidFill>
                 <a:latin typeface="IBM Plex Sans"/>
               </a:rPr>
-              <a:t>10 · Infrastruktur, Netz, Spital, Industrie</a:t>
+              <a:t>10 · Infrastruktur, Spital, Industrie</a:t>
             </a:r>
           </a:p>
         </p:txBody>
@@ -10435,7 +10569,7 @@
                           </a:solidFill>
                           <a:latin typeface="IBM Plex Sans"/>
                         </a:rPr>
-                        <a:t>CKW: UW Sursee und Trafostations-Erneuerung</a:t>
+                        <a:t>USZ Campus MITTE1|2</a:t>
                       </a:r>
                     </a:p>
                   </a:txBody>
@@ -10462,7 +10596,7 @@
                           </a:solidFill>
                           <a:latin typeface="IBM Plex Sans"/>
                         </a:rPr>
-                        <a:t>CKW</a:t>
+                        <a:t>b+p baurealisation</a:t>
                       </a:r>
                     </a:p>
                   </a:txBody>
@@ -10489,7 +10623,7 @@
                           </a:solidFill>
                           <a:latin typeface="IBM Plex Sans"/>
                         </a:rPr>
-                        <a:t>76'300</a:t>
+                        <a:t>125'400</a:t>
                       </a:r>
                     </a:p>
                   </a:txBody>
@@ -10516,227 +10650,7 @@
                           </a:solidFill>
                           <a:latin typeface="IBM Plex Sans"/>
                         </a:rPr>
-                        <a:t>19'100</a:t>
-                      </a:r>
-                    </a:p>
-                  </a:txBody>
-                  <a:tcPr marL="109728" marR="91440" marT="45720" marB="45720" anchor="ctr">
-                    <a:solidFill>
-                      <a:srgbClr val="FFFFFF"/>
-                    </a:solidFill>
-                  </a:tcPr>
-                </a:tc>
-              </a:tr>
-              <a:tr h="365760">
-                <a:tc>
-                  <a:txBody>
-                    <a:bodyPr wrap="square"/>
-                    <a:lstStyle/>
-                    <a:p>
-                      <a:pPr>
-                        <a:lnSpc>
-                          <a:spcPct val="100000"/>
-                        </a:lnSpc>
-                      </a:pPr>
-                      <a:r>
-                        <a:rPr sz="1050" b="1">
-                          <a:solidFill>
-                            <a:srgbClr val="58595B"/>
-                          </a:solidFill>
-                          <a:latin typeface="IBM Plex Sans"/>
-                        </a:rPr>
-                        <a:t>USZ Campus MITTE1|2</a:t>
-                      </a:r>
-                    </a:p>
-                  </a:txBody>
-                  <a:tcPr marL="109728" marR="91440" marT="45720" marB="45720" anchor="ctr">
-                    <a:solidFill>
-                      <a:srgbClr val="F4F4F4"/>
-                    </a:solidFill>
-                  </a:tcPr>
-                </a:tc>
-                <a:tc>
-                  <a:txBody>
-                    <a:bodyPr wrap="square"/>
-                    <a:lstStyle/>
-                    <a:p>
-                      <a:pPr>
-                        <a:lnSpc>
-                          <a:spcPct val="100000"/>
-                        </a:lnSpc>
-                      </a:pPr>
-                      <a:r>
-                        <a:rPr sz="1050" b="0">
-                          <a:solidFill>
-                            <a:srgbClr val="58595B"/>
-                          </a:solidFill>
-                          <a:latin typeface="IBM Plex Sans"/>
-                        </a:rPr>
-                        <a:t>b+p baurealisation</a:t>
-                      </a:r>
-                    </a:p>
-                  </a:txBody>
-                  <a:tcPr marL="109728" marR="91440" marT="45720" marB="45720" anchor="ctr">
-                    <a:solidFill>
-                      <a:srgbClr val="F4F4F4"/>
-                    </a:solidFill>
-                  </a:tcPr>
-                </a:tc>
-                <a:tc>
-                  <a:txBody>
-                    <a:bodyPr wrap="square"/>
-                    <a:lstStyle/>
-                    <a:p>
-                      <a:pPr>
-                        <a:lnSpc>
-                          <a:spcPct val="100000"/>
-                        </a:lnSpc>
-                      </a:pPr>
-                      <a:r>
-                        <a:rPr sz="1050" b="0">
-                          <a:solidFill>
-                            <a:srgbClr val="58595B"/>
-                          </a:solidFill>
-                          <a:latin typeface="IBM Plex Sans"/>
-                        </a:rPr>
-                        <a:t>125'400</a:t>
-                      </a:r>
-                    </a:p>
-                  </a:txBody>
-                  <a:tcPr marL="109728" marR="91440" marT="45720" marB="45720" anchor="ctr">
-                    <a:solidFill>
-                      <a:srgbClr val="F4F4F4"/>
-                    </a:solidFill>
-                  </a:tcPr>
-                </a:tc>
-                <a:tc>
-                  <a:txBody>
-                    <a:bodyPr wrap="square"/>
-                    <a:lstStyle/>
-                    <a:p>
-                      <a:pPr>
-                        <a:lnSpc>
-                          <a:spcPct val="100000"/>
-                        </a:lnSpc>
-                      </a:pPr>
-                      <a:r>
-                        <a:rPr sz="1050" b="0">
-                          <a:solidFill>
-                            <a:srgbClr val="58595B"/>
-                          </a:solidFill>
-                          <a:latin typeface="IBM Plex Sans"/>
-                        </a:rPr>
                         <a:t>18'800</a:t>
-                      </a:r>
-                    </a:p>
-                  </a:txBody>
-                  <a:tcPr marL="109728" marR="91440" marT="45720" marB="45720" anchor="ctr">
-                    <a:solidFill>
-                      <a:srgbClr val="F4F4F4"/>
-                    </a:solidFill>
-                  </a:tcPr>
-                </a:tc>
-              </a:tr>
-              <a:tr h="365760">
-                <a:tc>
-                  <a:txBody>
-                    <a:bodyPr wrap="square"/>
-                    <a:lstStyle/>
-                    <a:p>
-                      <a:pPr>
-                        <a:lnSpc>
-                          <a:spcPct val="100000"/>
-                        </a:lnSpc>
-                      </a:pPr>
-                      <a:r>
-                        <a:rPr sz="1050" b="1">
-                          <a:solidFill>
-                            <a:srgbClr val="58595B"/>
-                          </a:solidFill>
-                          <a:latin typeface="IBM Plex Sans"/>
-                        </a:rPr>
-                        <a:t>Axpo UW Niederurnen (Gesamterneuerung)</a:t>
-                      </a:r>
-                    </a:p>
-                  </a:txBody>
-                  <a:tcPr marL="109728" marR="91440" marT="45720" marB="45720" anchor="ctr">
-                    <a:solidFill>
-                      <a:srgbClr val="FFFFFF"/>
-                    </a:solidFill>
-                  </a:tcPr>
-                </a:tc>
-                <a:tc>
-                  <a:txBody>
-                    <a:bodyPr wrap="square"/>
-                    <a:lstStyle/>
-                    <a:p>
-                      <a:pPr>
-                        <a:lnSpc>
-                          <a:spcPct val="100000"/>
-                        </a:lnSpc>
-                      </a:pPr>
-                      <a:r>
-                        <a:rPr sz="1050" b="0">
-                          <a:solidFill>
-                            <a:srgbClr val="58595B"/>
-                          </a:solidFill>
-                          <a:latin typeface="IBM Plex Sans"/>
-                        </a:rPr>
-                        <a:t>Axpo Grid</a:t>
-                      </a:r>
-                    </a:p>
-                  </a:txBody>
-                  <a:tcPr marL="109728" marR="91440" marT="45720" marB="45720" anchor="ctr">
-                    <a:solidFill>
-                      <a:srgbClr val="FFFFFF"/>
-                    </a:solidFill>
-                  </a:tcPr>
-                </a:tc>
-                <a:tc>
-                  <a:txBody>
-                    <a:bodyPr wrap="square"/>
-                    <a:lstStyle/>
-                    <a:p>
-                      <a:pPr>
-                        <a:lnSpc>
-                          <a:spcPct val="100000"/>
-                        </a:lnSpc>
-                      </a:pPr>
-                      <a:r>
-                        <a:rPr sz="1050" b="0">
-                          <a:solidFill>
-                            <a:srgbClr val="58595B"/>
-                          </a:solidFill>
-                          <a:latin typeface="IBM Plex Sans"/>
-                        </a:rPr>
-                        <a:t>67'800</a:t>
-                      </a:r>
-                    </a:p>
-                  </a:txBody>
-                  <a:tcPr marL="109728" marR="91440" marT="45720" marB="45720" anchor="ctr">
-                    <a:solidFill>
-                      <a:srgbClr val="FFFFFF"/>
-                    </a:solidFill>
-                  </a:tcPr>
-                </a:tc>
-                <a:tc>
-                  <a:txBody>
-                    <a:bodyPr wrap="square"/>
-                    <a:lstStyle/>
-                    <a:p>
-                      <a:pPr>
-                        <a:lnSpc>
-                          <a:spcPct val="100000"/>
-                        </a:lnSpc>
-                      </a:pPr>
-                      <a:r>
-                        <a:rPr sz="1050" b="0">
-                          <a:solidFill>
-                            <a:srgbClr val="58595B"/>
-                          </a:solidFill>
-                          <a:latin typeface="IBM Plex Sans"/>
-                        </a:rPr>
-                        <a:t>17'000</a:t>
                       </a:r>
                     </a:p>
                   </a:txBody>
@@ -10857,6 +10771,226 @@
                   </a:tcPr>
                 </a:tc>
               </a:tr>
+              <a:tr h="365760">
+                <a:tc>
+                  <a:txBody>
+                    <a:bodyPr wrap="square"/>
+                    <a:lstStyle/>
+                    <a:p>
+                      <a:pPr>
+                        <a:lnSpc>
+                          <a:spcPct val="100000"/>
+                        </a:lnSpc>
+                      </a:pPr>
+                      <a:r>
+                        <a:rPr sz="1050" b="1">
+                          <a:solidFill>
+                            <a:srgbClr val="58595B"/>
+                          </a:solidFill>
+                          <a:latin typeface="IBM Plex Sans"/>
+                        </a:rPr>
+                        <a:t>Brüttener Tunnel (MehrSpur Zürich-Winterthur)</a:t>
+                      </a:r>
+                    </a:p>
+                  </a:txBody>
+                  <a:tcPr marL="109728" marR="91440" marT="45720" marB="45720" anchor="ctr">
+                    <a:solidFill>
+                      <a:srgbClr val="FFFFFF"/>
+                    </a:solidFill>
+                  </a:tcPr>
+                </a:tc>
+                <a:tc>
+                  <a:txBody>
+                    <a:bodyPr wrap="square"/>
+                    <a:lstStyle/>
+                    <a:p>
+                      <a:pPr>
+                        <a:lnSpc>
+                          <a:spcPct val="100000"/>
+                        </a:lnSpc>
+                      </a:pPr>
+                      <a:r>
+                        <a:rPr sz="1050" b="0">
+                          <a:solidFill>
+                            <a:srgbClr val="58595B"/>
+                          </a:solidFill>
+                          <a:latin typeface="IBM Plex Sans"/>
+                        </a:rPr>
+                        <a:t>SBB</a:t>
+                      </a:r>
+                    </a:p>
+                  </a:txBody>
+                  <a:tcPr marL="109728" marR="91440" marT="45720" marB="45720" anchor="ctr">
+                    <a:solidFill>
+                      <a:srgbClr val="FFFFFF"/>
+                    </a:solidFill>
+                  </a:tcPr>
+                </a:tc>
+                <a:tc>
+                  <a:txBody>
+                    <a:bodyPr wrap="square"/>
+                    <a:lstStyle/>
+                    <a:p>
+                      <a:pPr>
+                        <a:lnSpc>
+                          <a:spcPct val="100000"/>
+                        </a:lnSpc>
+                      </a:pPr>
+                      <a:r>
+                        <a:rPr sz="1050" b="0">
+                          <a:solidFill>
+                            <a:srgbClr val="58595B"/>
+                          </a:solidFill>
+                          <a:latin typeface="IBM Plex Sans"/>
+                        </a:rPr>
+                        <a:t>110'200</a:t>
+                      </a:r>
+                    </a:p>
+                  </a:txBody>
+                  <a:tcPr marL="109728" marR="91440" marT="45720" marB="45720" anchor="ctr">
+                    <a:solidFill>
+                      <a:srgbClr val="FFFFFF"/>
+                    </a:solidFill>
+                  </a:tcPr>
+                </a:tc>
+                <a:tc>
+                  <a:txBody>
+                    <a:bodyPr wrap="square"/>
+                    <a:lstStyle/>
+                    <a:p>
+                      <a:pPr>
+                        <a:lnSpc>
+                          <a:spcPct val="100000"/>
+                        </a:lnSpc>
+                      </a:pPr>
+                      <a:r>
+                        <a:rPr sz="1050" b="0">
+                          <a:solidFill>
+                            <a:srgbClr val="58595B"/>
+                          </a:solidFill>
+                          <a:latin typeface="IBM Plex Sans"/>
+                        </a:rPr>
+                        <a:t>16'500</a:t>
+                      </a:r>
+                    </a:p>
+                  </a:txBody>
+                  <a:tcPr marL="109728" marR="91440" marT="45720" marB="45720" anchor="ctr">
+                    <a:solidFill>
+                      <a:srgbClr val="FFFFFF"/>
+                    </a:solidFill>
+                  </a:tcPr>
+                </a:tc>
+              </a:tr>
+              <a:tr h="365760">
+                <a:tc>
+                  <a:txBody>
+                    <a:bodyPr wrap="square"/>
+                    <a:lstStyle/>
+                    <a:p>
+                      <a:pPr>
+                        <a:lnSpc>
+                          <a:spcPct val="100000"/>
+                        </a:lnSpc>
+                      </a:pPr>
+                      <a:r>
+                        <a:rPr sz="1050" b="1">
+                          <a:solidFill>
+                            <a:srgbClr val="58595B"/>
+                          </a:solidFill>
+                          <a:latin typeface="IBM Plex Sans"/>
+                        </a:rPr>
+                        <a:t>Roche Basel Bau 51 und laufende Bauten</a:t>
+                      </a:r>
+                    </a:p>
+                  </a:txBody>
+                  <a:tcPr marL="109728" marR="91440" marT="45720" marB="45720" anchor="ctr">
+                    <a:solidFill>
+                      <a:srgbClr val="F4F4F4"/>
+                    </a:solidFill>
+                  </a:tcPr>
+                </a:tc>
+                <a:tc>
+                  <a:txBody>
+                    <a:bodyPr wrap="square"/>
+                    <a:lstStyle/>
+                    <a:p>
+                      <a:pPr>
+                        <a:lnSpc>
+                          <a:spcPct val="100000"/>
+                        </a:lnSpc>
+                      </a:pPr>
+                      <a:r>
+                        <a:rPr sz="1050" b="0">
+                          <a:solidFill>
+                            <a:srgbClr val="58595B"/>
+                          </a:solidFill>
+                          <a:latin typeface="IBM Plex Sans"/>
+                        </a:rPr>
+                        <a:t>Roche</a:t>
+                      </a:r>
+                    </a:p>
+                  </a:txBody>
+                  <a:tcPr marL="109728" marR="91440" marT="45720" marB="45720" anchor="ctr">
+                    <a:solidFill>
+                      <a:srgbClr val="F4F4F4"/>
+                    </a:solidFill>
+                  </a:tcPr>
+                </a:tc>
+                <a:tc>
+                  <a:txBody>
+                    <a:bodyPr wrap="square"/>
+                    <a:lstStyle/>
+                    <a:p>
+                      <a:pPr>
+                        <a:lnSpc>
+                          <a:spcPct val="100000"/>
+                        </a:lnSpc>
+                      </a:pPr>
+                      <a:r>
+                        <a:rPr sz="1050" b="0">
+                          <a:solidFill>
+                            <a:srgbClr val="58595B"/>
+                          </a:solidFill>
+                          <a:latin typeface="IBM Plex Sans"/>
+                        </a:rPr>
+                        <a:t>110'200</a:t>
+                      </a:r>
+                    </a:p>
+                  </a:txBody>
+                  <a:tcPr marL="109728" marR="91440" marT="45720" marB="45720" anchor="ctr">
+                    <a:solidFill>
+                      <a:srgbClr val="F4F4F4"/>
+                    </a:solidFill>
+                  </a:tcPr>
+                </a:tc>
+                <a:tc>
+                  <a:txBody>
+                    <a:bodyPr wrap="square"/>
+                    <a:lstStyle/>
+                    <a:p>
+                      <a:pPr>
+                        <a:lnSpc>
+                          <a:spcPct val="100000"/>
+                        </a:lnSpc>
+                      </a:pPr>
+                      <a:r>
+                        <a:rPr sz="1050" b="0">
+                          <a:solidFill>
+                            <a:srgbClr val="58595B"/>
+                          </a:solidFill>
+                          <a:latin typeface="IBM Plex Sans"/>
+                        </a:rPr>
+                        <a:t>16'500</a:t>
+                      </a:r>
+                    </a:p>
+                  </a:txBody>
+                  <a:tcPr marL="109728" marR="91440" marT="45720" marB="45720" anchor="ctr">
+                    <a:solidFill>
+                      <a:srgbClr val="F4F4F4"/>
+                    </a:solidFill>
+                  </a:tcPr>
+                </a:tc>
+              </a:tr>
             </a:tbl>
           </a:graphicData>
         </a:graphic>
@@ -10965,7 +11099,7 @@
                 </a:solidFill>
                 <a:latin typeface="IBM Plex Sans"/>
               </a:rPr>
-              <a:t>11 · Events</a:t>
+              <a:t>11 · EVU und Energie 2027</a:t>
             </a:r>
           </a:p>
         </p:txBody>
@@ -11004,7 +11138,7 @@
                 </a:solidFill>
                 <a:latin typeface="Alata"/>
               </a:rPr>
-              <a:t>Winter 2027 zuerst, ESAF 2028 jetzt offerieren</a:t>
+              <a:t>16 Netz- und Energieprojekte über CHF 50'000</a:t>
             </a:r>
           </a:p>
         </p:txBody>
@@ -11123,9 +11257,1357 @@
           </a:p>
         </p:txBody>
       </p:sp>
+      <p:graphicFrame>
+        <p:nvGraphicFramePr>
+          <p:cNvPr id="7" name="Table 6"/>
+          <p:cNvGraphicFramePr>
+            <a:graphicFrameLocks noGrp="1"/>
+          </p:cNvGraphicFramePr>
+          <p:nvPr/>
+        </p:nvGraphicFramePr>
+        <p:xfrm>
+          <a:off x="429768" y="1874519"/>
+          <a:ext cx="7863837" cy="4005072"/>
+        </p:xfrm>
+        <a:graphic>
+          <a:graphicData uri="http://schemas.openxmlformats.org/drawingml/2006/table">
+            <a:tbl>
+              <a:tblPr>
+                <a:tableStyleId>{2D5ABB26-0587-4C30-8999-92F81FD0307C}</a:tableStyleId>
+              </a:tblPr>
+              <a:tblGrid>
+                <a:gridCol w="3574472"/>
+                <a:gridCol w="1965959"/>
+                <a:gridCol w="1161703"/>
+                <a:gridCol w="1161703"/>
+              </a:tblGrid>
+              <a:tr h="384048">
+                <a:tc>
+                  <a:txBody>
+                    <a:bodyPr wrap="square"/>
+                    <a:lstStyle/>
+                    <a:p>
+                      <a:pPr>
+                        <a:lnSpc>
+                          <a:spcPct val="100000"/>
+                        </a:lnSpc>
+                      </a:pPr>
+                      <a:r>
+                        <a:rPr sz="1050" b="1">
+                          <a:solidFill>
+                            <a:srgbClr val="FFFFFF"/>
+                          </a:solidFill>
+                          <a:latin typeface="IBM Plex Sans"/>
+                        </a:rPr>
+                        <a:t>Projekt</a:t>
+                      </a:r>
+                    </a:p>
+                  </a:txBody>
+                  <a:tcPr marL="109728" marR="91440" marT="45720" marB="45720" anchor="ctr">
+                    <a:solidFill>
+                      <a:srgbClr val="E00036"/>
+                    </a:solidFill>
+                  </a:tcPr>
+                </a:tc>
+                <a:tc>
+                  <a:txBody>
+                    <a:bodyPr wrap="square"/>
+                    <a:lstStyle/>
+                    <a:p>
+                      <a:pPr>
+                        <a:lnSpc>
+                          <a:spcPct val="100000"/>
+                        </a:lnSpc>
+                      </a:pPr>
+                      <a:r>
+                        <a:rPr sz="1050" b="1">
+                          <a:solidFill>
+                            <a:srgbClr val="FFFFFF"/>
+                          </a:solidFill>
+                          <a:latin typeface="IBM Plex Sans"/>
+                        </a:rPr>
+                        <a:t>Betreiber</a:t>
+                      </a:r>
+                    </a:p>
+                  </a:txBody>
+                  <a:tcPr marL="109728" marR="91440" marT="45720" marB="45720" anchor="ctr">
+                    <a:solidFill>
+                      <a:srgbClr val="E00036"/>
+                    </a:solidFill>
+                  </a:tcPr>
+                </a:tc>
+                <a:tc>
+                  <a:txBody>
+                    <a:bodyPr wrap="square"/>
+                    <a:lstStyle/>
+                    <a:p>
+                      <a:pPr>
+                        <a:lnSpc>
+                          <a:spcPct val="100000"/>
+                        </a:lnSpc>
+                      </a:pPr>
+                      <a:r>
+                        <a:rPr sz="1050" b="1">
+                          <a:solidFill>
+                            <a:srgbClr val="FFFFFF"/>
+                          </a:solidFill>
+                          <a:latin typeface="IBM Plex Sans"/>
+                        </a:rPr>
+                        <a:t>Potenzial CHF</a:t>
+                      </a:r>
+                    </a:p>
+                  </a:txBody>
+                  <a:tcPr marL="109728" marR="91440" marT="45720" marB="45720" anchor="ctr">
+                    <a:solidFill>
+                      <a:srgbClr val="E00036"/>
+                    </a:solidFill>
+                  </a:tcPr>
+                </a:tc>
+                <a:tc>
+                  <a:txBody>
+                    <a:bodyPr wrap="square"/>
+                    <a:lstStyle/>
+                    <a:p>
+                      <a:pPr>
+                        <a:lnSpc>
+                          <a:spcPct val="100000"/>
+                        </a:lnSpc>
+                      </a:pPr>
+                      <a:r>
+                        <a:rPr sz="1050" b="1">
+                          <a:solidFill>
+                            <a:srgbClr val="FFFFFF"/>
+                          </a:solidFill>
+                          <a:latin typeface="IBM Plex Sans"/>
+                        </a:rPr>
+                        <a:t>Erwartung 2027</a:t>
+                      </a:r>
+                    </a:p>
+                  </a:txBody>
+                  <a:tcPr marL="109728" marR="91440" marT="45720" marB="45720" anchor="ctr">
+                    <a:solidFill>
+                      <a:srgbClr val="E00036"/>
+                    </a:solidFill>
+                  </a:tcPr>
+                </a:tc>
+              </a:tr>
+              <a:tr h="329184">
+                <a:tc>
+                  <a:txBody>
+                    <a:bodyPr wrap="square"/>
+                    <a:lstStyle/>
+                    <a:p>
+                      <a:pPr>
+                        <a:lnSpc>
+                          <a:spcPct val="100000"/>
+                        </a:lnSpc>
+                      </a:pPr>
+                      <a:r>
+                        <a:rPr sz="1000" b="1">
+                          <a:solidFill>
+                            <a:srgbClr val="58595B"/>
+                          </a:solidFill>
+                          <a:latin typeface="IBM Plex Sans"/>
+                        </a:rPr>
+                        <a:t>Paket Alpine Solar-Baustellen 2027</a:t>
+                      </a:r>
+                    </a:p>
+                  </a:txBody>
+                  <a:tcPr marL="109728" marR="91440" marT="45720" marB="45720" anchor="ctr">
+                    <a:solidFill>
+                      <a:srgbClr val="FFFFFF"/>
+                    </a:solidFill>
+                  </a:tcPr>
+                </a:tc>
+                <a:tc>
+                  <a:txBody>
+                    <a:bodyPr wrap="square"/>
+                    <a:lstStyle/>
+                    <a:p>
+                      <a:pPr>
+                        <a:lnSpc>
+                          <a:spcPct val="100000"/>
+                        </a:lnSpc>
+                      </a:pPr>
+                      <a:r>
+                        <a:rPr sz="1000" b="0">
+                          <a:solidFill>
+                            <a:srgbClr val="58595B"/>
+                          </a:solidFill>
+                          <a:latin typeface="IBM Plex Sans"/>
+                        </a:rPr>
+                        <a:t>mehrere, siehe Detailblatt</a:t>
+                      </a:r>
+                    </a:p>
+                  </a:txBody>
+                  <a:tcPr marL="109728" marR="91440" marT="45720" marB="45720" anchor="ctr">
+                    <a:solidFill>
+                      <a:srgbClr val="FFFFFF"/>
+                    </a:solidFill>
+                  </a:tcPr>
+                </a:tc>
+                <a:tc>
+                  <a:txBody>
+                    <a:bodyPr wrap="square"/>
+                    <a:lstStyle/>
+                    <a:p>
+                      <a:pPr>
+                        <a:lnSpc>
+                          <a:spcPct val="100000"/>
+                        </a:lnSpc>
+                      </a:pPr>
+                      <a:r>
+                        <a:rPr sz="1000" b="0">
+                          <a:solidFill>
+                            <a:srgbClr val="58595B"/>
+                          </a:solidFill>
+                          <a:latin typeface="IBM Plex Sans"/>
+                        </a:rPr>
+                        <a:t>215'400</a:t>
+                      </a:r>
+                    </a:p>
+                  </a:txBody>
+                  <a:tcPr marL="109728" marR="91440" marT="45720" marB="45720" anchor="ctr">
+                    <a:solidFill>
+                      <a:srgbClr val="FFFFFF"/>
+                    </a:solidFill>
+                  </a:tcPr>
+                </a:tc>
+                <a:tc>
+                  <a:txBody>
+                    <a:bodyPr wrap="square"/>
+                    <a:lstStyle/>
+                    <a:p>
+                      <a:pPr>
+                        <a:lnSpc>
+                          <a:spcPct val="100000"/>
+                        </a:lnSpc>
+                      </a:pPr>
+                      <a:r>
+                        <a:rPr sz="1000" b="0">
+                          <a:solidFill>
+                            <a:srgbClr val="58595B"/>
+                          </a:solidFill>
+                          <a:latin typeface="IBM Plex Sans"/>
+                        </a:rPr>
+                        <a:t>32'300</a:t>
+                      </a:r>
+                    </a:p>
+                  </a:txBody>
+                  <a:tcPr marL="109728" marR="91440" marT="45720" marB="45720" anchor="ctr">
+                    <a:solidFill>
+                      <a:srgbClr val="FFFFFF"/>
+                    </a:solidFill>
+                  </a:tcPr>
+                </a:tc>
+              </a:tr>
+              <a:tr h="329184">
+                <a:tc>
+                  <a:txBody>
+                    <a:bodyPr wrap="square"/>
+                    <a:lstStyle/>
+                    <a:p>
+                      <a:pPr>
+                        <a:lnSpc>
+                          <a:spcPct val="100000"/>
+                        </a:lnSpc>
+                      </a:pPr>
+                      <a:r>
+                        <a:rPr sz="1000" b="1">
+                          <a:solidFill>
+                            <a:srgbClr val="58595B"/>
+                          </a:solidFill>
+                          <a:latin typeface="IBM Plex Sans"/>
+                        </a:rPr>
+                        <a:t>CKW: UW Sursee und Trafostations-Erneuerung</a:t>
+                      </a:r>
+                    </a:p>
+                  </a:txBody>
+                  <a:tcPr marL="109728" marR="91440" marT="45720" marB="45720" anchor="ctr">
+                    <a:solidFill>
+                      <a:srgbClr val="F4F4F4"/>
+                    </a:solidFill>
+                  </a:tcPr>
+                </a:tc>
+                <a:tc>
+                  <a:txBody>
+                    <a:bodyPr wrap="square"/>
+                    <a:lstStyle/>
+                    <a:p>
+                      <a:pPr>
+                        <a:lnSpc>
+                          <a:spcPct val="100000"/>
+                        </a:lnSpc>
+                      </a:pPr>
+                      <a:r>
+                        <a:rPr sz="1000" b="0">
+                          <a:solidFill>
+                            <a:srgbClr val="58595B"/>
+                          </a:solidFill>
+                          <a:latin typeface="IBM Plex Sans"/>
+                        </a:rPr>
+                        <a:t>CKW</a:t>
+                      </a:r>
+                    </a:p>
+                  </a:txBody>
+                  <a:tcPr marL="109728" marR="91440" marT="45720" marB="45720" anchor="ctr">
+                    <a:solidFill>
+                      <a:srgbClr val="F4F4F4"/>
+                    </a:solidFill>
+                  </a:tcPr>
+                </a:tc>
+                <a:tc>
+                  <a:txBody>
+                    <a:bodyPr wrap="square"/>
+                    <a:lstStyle/>
+                    <a:p>
+                      <a:pPr>
+                        <a:lnSpc>
+                          <a:spcPct val="100000"/>
+                        </a:lnSpc>
+                      </a:pPr>
+                      <a:r>
+                        <a:rPr sz="1000" b="0">
+                          <a:solidFill>
+                            <a:srgbClr val="58595B"/>
+                          </a:solidFill>
+                          <a:latin typeface="IBM Plex Sans"/>
+                        </a:rPr>
+                        <a:t>76'300</a:t>
+                      </a:r>
+                    </a:p>
+                  </a:txBody>
+                  <a:tcPr marL="109728" marR="91440" marT="45720" marB="45720" anchor="ctr">
+                    <a:solidFill>
+                      <a:srgbClr val="F4F4F4"/>
+                    </a:solidFill>
+                  </a:tcPr>
+                </a:tc>
+                <a:tc>
+                  <a:txBody>
+                    <a:bodyPr wrap="square"/>
+                    <a:lstStyle/>
+                    <a:p>
+                      <a:pPr>
+                        <a:lnSpc>
+                          <a:spcPct val="100000"/>
+                        </a:lnSpc>
+                      </a:pPr>
+                      <a:r>
+                        <a:rPr sz="1000" b="0">
+                          <a:solidFill>
+                            <a:srgbClr val="58595B"/>
+                          </a:solidFill>
+                          <a:latin typeface="IBM Plex Sans"/>
+                        </a:rPr>
+                        <a:t>19'100</a:t>
+                      </a:r>
+                    </a:p>
+                  </a:txBody>
+                  <a:tcPr marL="109728" marR="91440" marT="45720" marB="45720" anchor="ctr">
+                    <a:solidFill>
+                      <a:srgbClr val="F4F4F4"/>
+                    </a:solidFill>
+                  </a:tcPr>
+                </a:tc>
+              </a:tr>
+              <a:tr h="329184">
+                <a:tc>
+                  <a:txBody>
+                    <a:bodyPr wrap="square"/>
+                    <a:lstStyle/>
+                    <a:p>
+                      <a:pPr>
+                        <a:lnSpc>
+                          <a:spcPct val="100000"/>
+                        </a:lnSpc>
+                      </a:pPr>
+                      <a:r>
+                        <a:rPr sz="1000" b="1">
+                          <a:solidFill>
+                            <a:srgbClr val="58595B"/>
+                          </a:solidFill>
+                          <a:latin typeface="IBM Plex Sans"/>
+                        </a:rPr>
+                        <a:t>Axpo UW Niederurnen (Gesamterneuerung)</a:t>
+                      </a:r>
+                    </a:p>
+                  </a:txBody>
+                  <a:tcPr marL="109728" marR="91440" marT="45720" marB="45720" anchor="ctr">
+                    <a:solidFill>
+                      <a:srgbClr val="FFFFFF"/>
+                    </a:solidFill>
+                  </a:tcPr>
+                </a:tc>
+                <a:tc>
+                  <a:txBody>
+                    <a:bodyPr wrap="square"/>
+                    <a:lstStyle/>
+                    <a:p>
+                      <a:pPr>
+                        <a:lnSpc>
+                          <a:spcPct val="100000"/>
+                        </a:lnSpc>
+                      </a:pPr>
+                      <a:r>
+                        <a:rPr sz="1000" b="0">
+                          <a:solidFill>
+                            <a:srgbClr val="58595B"/>
+                          </a:solidFill>
+                          <a:latin typeface="IBM Plex Sans"/>
+                        </a:rPr>
+                        <a:t>Axpo Grid</a:t>
+                      </a:r>
+                    </a:p>
+                  </a:txBody>
+                  <a:tcPr marL="109728" marR="91440" marT="45720" marB="45720" anchor="ctr">
+                    <a:solidFill>
+                      <a:srgbClr val="FFFFFF"/>
+                    </a:solidFill>
+                  </a:tcPr>
+                </a:tc>
+                <a:tc>
+                  <a:txBody>
+                    <a:bodyPr wrap="square"/>
+                    <a:lstStyle/>
+                    <a:p>
+                      <a:pPr>
+                        <a:lnSpc>
+                          <a:spcPct val="100000"/>
+                        </a:lnSpc>
+                      </a:pPr>
+                      <a:r>
+                        <a:rPr sz="1000" b="0">
+                          <a:solidFill>
+                            <a:srgbClr val="58595B"/>
+                          </a:solidFill>
+                          <a:latin typeface="IBM Plex Sans"/>
+                        </a:rPr>
+                        <a:t>67'800</a:t>
+                      </a:r>
+                    </a:p>
+                  </a:txBody>
+                  <a:tcPr marL="109728" marR="91440" marT="45720" marB="45720" anchor="ctr">
+                    <a:solidFill>
+                      <a:srgbClr val="FFFFFF"/>
+                    </a:solidFill>
+                  </a:tcPr>
+                </a:tc>
+                <a:tc>
+                  <a:txBody>
+                    <a:bodyPr wrap="square"/>
+                    <a:lstStyle/>
+                    <a:p>
+                      <a:pPr>
+                        <a:lnSpc>
+                          <a:spcPct val="100000"/>
+                        </a:lnSpc>
+                      </a:pPr>
+                      <a:r>
+                        <a:rPr sz="1000" b="0">
+                          <a:solidFill>
+                            <a:srgbClr val="58595B"/>
+                          </a:solidFill>
+                          <a:latin typeface="IBM Plex Sans"/>
+                        </a:rPr>
+                        <a:t>17'000</a:t>
+                      </a:r>
+                    </a:p>
+                  </a:txBody>
+                  <a:tcPr marL="109728" marR="91440" marT="45720" marB="45720" anchor="ctr">
+                    <a:solidFill>
+                      <a:srgbClr val="FFFFFF"/>
+                    </a:solidFill>
+                  </a:tcPr>
+                </a:tc>
+              </a:tr>
+              <a:tr h="329184">
+                <a:tc>
+                  <a:txBody>
+                    <a:bodyPr wrap="square"/>
+                    <a:lstStyle/>
+                    <a:p>
+                      <a:pPr>
+                        <a:lnSpc>
+                          <a:spcPct val="100000"/>
+                        </a:lnSpc>
+                      </a:pPr>
+                      <a:r>
+                        <a:rPr sz="1000" b="1">
+                          <a:solidFill>
+                            <a:srgbClr val="58595B"/>
+                          </a:solidFill>
+                          <a:latin typeface="IBM Plex Sans"/>
+                        </a:rPr>
+                        <a:t>Poste Galmiz (Neubau, Verkabelung 125 kV)</a:t>
+                      </a:r>
+                    </a:p>
+                  </a:txBody>
+                  <a:tcPr marL="109728" marR="91440" marT="45720" marB="45720" anchor="ctr">
+                    <a:solidFill>
+                      <a:srgbClr val="F4F4F4"/>
+                    </a:solidFill>
+                  </a:tcPr>
+                </a:tc>
+                <a:tc>
+                  <a:txBody>
+                    <a:bodyPr wrap="square"/>
+                    <a:lstStyle/>
+                    <a:p>
+                      <a:pPr>
+                        <a:lnSpc>
+                          <a:spcPct val="100000"/>
+                        </a:lnSpc>
+                      </a:pPr>
+                      <a:r>
+                        <a:rPr sz="1000" b="0">
+                          <a:solidFill>
+                            <a:srgbClr val="58595B"/>
+                          </a:solidFill>
+                          <a:latin typeface="IBM Plex Sans"/>
+                        </a:rPr>
+                        <a:t>Groupe E / Swissgrid</a:t>
+                      </a:r>
+                    </a:p>
+                  </a:txBody>
+                  <a:tcPr marL="109728" marR="91440" marT="45720" marB="45720" anchor="ctr">
+                    <a:solidFill>
+                      <a:srgbClr val="F4F4F4"/>
+                    </a:solidFill>
+                  </a:tcPr>
+                </a:tc>
+                <a:tc>
+                  <a:txBody>
+                    <a:bodyPr wrap="square"/>
+                    <a:lstStyle/>
+                    <a:p>
+                      <a:pPr>
+                        <a:lnSpc>
+                          <a:spcPct val="100000"/>
+                        </a:lnSpc>
+                      </a:pPr>
+                      <a:r>
+                        <a:rPr sz="1000" b="0">
+                          <a:solidFill>
+                            <a:srgbClr val="58595B"/>
+                          </a:solidFill>
+                          <a:latin typeface="IBM Plex Sans"/>
+                        </a:rPr>
+                        <a:t>84'800</a:t>
+                      </a:r>
+                    </a:p>
+                  </a:txBody>
+                  <a:tcPr marL="109728" marR="91440" marT="45720" marB="45720" anchor="ctr">
+                    <a:solidFill>
+                      <a:srgbClr val="F4F4F4"/>
+                    </a:solidFill>
+                  </a:tcPr>
+                </a:tc>
+                <a:tc>
+                  <a:txBody>
+                    <a:bodyPr wrap="square"/>
+                    <a:lstStyle/>
+                    <a:p>
+                      <a:pPr>
+                        <a:lnSpc>
+                          <a:spcPct val="100000"/>
+                        </a:lnSpc>
+                      </a:pPr>
+                      <a:r>
+                        <a:rPr sz="1000" b="0">
+                          <a:solidFill>
+                            <a:srgbClr val="58595B"/>
+                          </a:solidFill>
+                          <a:latin typeface="IBM Plex Sans"/>
+                        </a:rPr>
+                        <a:t>17'000</a:t>
+                      </a:r>
+                    </a:p>
+                  </a:txBody>
+                  <a:tcPr marL="109728" marR="91440" marT="45720" marB="45720" anchor="ctr">
+                    <a:solidFill>
+                      <a:srgbClr val="F4F4F4"/>
+                    </a:solidFill>
+                  </a:tcPr>
+                </a:tc>
+              </a:tr>
+              <a:tr h="329184">
+                <a:tc>
+                  <a:txBody>
+                    <a:bodyPr wrap="square"/>
+                    <a:lstStyle/>
+                    <a:p>
+                      <a:pPr>
+                        <a:lnSpc>
+                          <a:spcPct val="100000"/>
+                        </a:lnSpc>
+                      </a:pPr>
+                      <a:r>
+                        <a:rPr sz="1000" b="1">
+                          <a:solidFill>
+                            <a:srgbClr val="58595B"/>
+                          </a:solidFill>
+                          <a:latin typeface="IBM Plex Sans"/>
+                        </a:rPr>
+                        <a:t>UW Laax (Gesamterneuerung)</a:t>
+                      </a:r>
+                    </a:p>
+                  </a:txBody>
+                  <a:tcPr marL="109728" marR="91440" marT="45720" marB="45720" anchor="ctr">
+                    <a:solidFill>
+                      <a:srgbClr val="FFFFFF"/>
+                    </a:solidFill>
+                  </a:tcPr>
+                </a:tc>
+                <a:tc>
+                  <a:txBody>
+                    <a:bodyPr wrap="square"/>
+                    <a:lstStyle/>
+                    <a:p>
+                      <a:pPr>
+                        <a:lnSpc>
+                          <a:spcPct val="100000"/>
+                        </a:lnSpc>
+                      </a:pPr>
+                      <a:r>
+                        <a:rPr sz="1000" b="0">
+                          <a:solidFill>
+                            <a:srgbClr val="58595B"/>
+                          </a:solidFill>
+                          <a:latin typeface="IBM Plex Sans"/>
+                        </a:rPr>
+                        <a:t>Repower</a:t>
+                      </a:r>
+                    </a:p>
+                  </a:txBody>
+                  <a:tcPr marL="109728" marR="91440" marT="45720" marB="45720" anchor="ctr">
+                    <a:solidFill>
+                      <a:srgbClr val="FFFFFF"/>
+                    </a:solidFill>
+                  </a:tcPr>
+                </a:tc>
+                <a:tc>
+                  <a:txBody>
+                    <a:bodyPr wrap="square"/>
+                    <a:lstStyle/>
+                    <a:p>
+                      <a:pPr>
+                        <a:lnSpc>
+                          <a:spcPct val="100000"/>
+                        </a:lnSpc>
+                      </a:pPr>
+                      <a:r>
+                        <a:rPr sz="1000" b="0">
+                          <a:solidFill>
+                            <a:srgbClr val="58595B"/>
+                          </a:solidFill>
+                          <a:latin typeface="IBM Plex Sans"/>
+                        </a:rPr>
+                        <a:t>67'800</a:t>
+                      </a:r>
+                    </a:p>
+                  </a:txBody>
+                  <a:tcPr marL="109728" marR="91440" marT="45720" marB="45720" anchor="ctr">
+                    <a:solidFill>
+                      <a:srgbClr val="FFFFFF"/>
+                    </a:solidFill>
+                  </a:tcPr>
+                </a:tc>
+                <a:tc>
+                  <a:txBody>
+                    <a:bodyPr wrap="square"/>
+                    <a:lstStyle/>
+                    <a:p>
+                      <a:pPr>
+                        <a:lnSpc>
+                          <a:spcPct val="100000"/>
+                        </a:lnSpc>
+                      </a:pPr>
+                      <a:r>
+                        <a:rPr sz="1000" b="0">
+                          <a:solidFill>
+                            <a:srgbClr val="58595B"/>
+                          </a:solidFill>
+                          <a:latin typeface="IBM Plex Sans"/>
+                        </a:rPr>
+                        <a:t>13'600</a:t>
+                      </a:r>
+                    </a:p>
+                  </a:txBody>
+                  <a:tcPr marL="109728" marR="91440" marT="45720" marB="45720" anchor="ctr">
+                    <a:solidFill>
+                      <a:srgbClr val="FFFFFF"/>
+                    </a:solidFill>
+                  </a:tcPr>
+                </a:tc>
+              </a:tr>
+              <a:tr h="329184">
+                <a:tc>
+                  <a:txBody>
+                    <a:bodyPr wrap="square"/>
+                    <a:lstStyle/>
+                    <a:p>
+                      <a:pPr>
+                        <a:lnSpc>
+                          <a:spcPct val="100000"/>
+                        </a:lnSpc>
+                      </a:pPr>
+                      <a:r>
+                        <a:rPr sz="1000" b="1">
+                          <a:solidFill>
+                            <a:srgbClr val="58595B"/>
+                          </a:solidFill>
+                          <a:latin typeface="IBM Plex Sans"/>
+                        </a:rPr>
+                        <a:t>CoolCity: Energiezentrale UW Selnau, Microtunnel</a:t>
+                      </a:r>
+                    </a:p>
+                  </a:txBody>
+                  <a:tcPr marL="109728" marR="91440" marT="45720" marB="45720" anchor="ctr">
+                    <a:solidFill>
+                      <a:srgbClr val="F4F4F4"/>
+                    </a:solidFill>
+                  </a:tcPr>
+                </a:tc>
+                <a:tc>
+                  <a:txBody>
+                    <a:bodyPr wrap="square"/>
+                    <a:lstStyle/>
+                    <a:p>
+                      <a:pPr>
+                        <a:lnSpc>
+                          <a:spcPct val="100000"/>
+                        </a:lnSpc>
+                      </a:pPr>
+                      <a:r>
+                        <a:rPr sz="1000" b="0">
+                          <a:solidFill>
+                            <a:srgbClr val="58595B"/>
+                          </a:solidFill>
+                          <a:latin typeface="IBM Plex Sans"/>
+                        </a:rPr>
+                        <a:t>ewz</a:t>
+                      </a:r>
+                    </a:p>
+                  </a:txBody>
+                  <a:tcPr marL="109728" marR="91440" marT="45720" marB="45720" anchor="ctr">
+                    <a:solidFill>
+                      <a:srgbClr val="F4F4F4"/>
+                    </a:solidFill>
+                  </a:tcPr>
+                </a:tc>
+                <a:tc>
+                  <a:txBody>
+                    <a:bodyPr wrap="square"/>
+                    <a:lstStyle/>
+                    <a:p>
+                      <a:pPr>
+                        <a:lnSpc>
+                          <a:spcPct val="100000"/>
+                        </a:lnSpc>
+                      </a:pPr>
+                      <a:r>
+                        <a:rPr sz="1000" b="0">
+                          <a:solidFill>
+                            <a:srgbClr val="58595B"/>
+                          </a:solidFill>
+                          <a:latin typeface="IBM Plex Sans"/>
+                        </a:rPr>
+                        <a:t>165'300</a:t>
+                      </a:r>
+                    </a:p>
+                  </a:txBody>
+                  <a:tcPr marL="109728" marR="91440" marT="45720" marB="45720" anchor="ctr">
+                    <a:solidFill>
+                      <a:srgbClr val="F4F4F4"/>
+                    </a:solidFill>
+                  </a:tcPr>
+                </a:tc>
+                <a:tc>
+                  <a:txBody>
+                    <a:bodyPr wrap="square"/>
+                    <a:lstStyle/>
+                    <a:p>
+                      <a:pPr>
+                        <a:lnSpc>
+                          <a:spcPct val="100000"/>
+                        </a:lnSpc>
+                      </a:pPr>
+                      <a:r>
+                        <a:rPr sz="1000" b="0">
+                          <a:solidFill>
+                            <a:srgbClr val="58595B"/>
+                          </a:solidFill>
+                          <a:latin typeface="IBM Plex Sans"/>
+                        </a:rPr>
+                        <a:t>12'400</a:t>
+                      </a:r>
+                    </a:p>
+                  </a:txBody>
+                  <a:tcPr marL="109728" marR="91440" marT="45720" marB="45720" anchor="ctr">
+                    <a:solidFill>
+                      <a:srgbClr val="F4F4F4"/>
+                    </a:solidFill>
+                  </a:tcPr>
+                </a:tc>
+              </a:tr>
+              <a:tr h="329184">
+                <a:tc>
+                  <a:txBody>
+                    <a:bodyPr wrap="square"/>
+                    <a:lstStyle/>
+                    <a:p>
+                      <a:pPr>
+                        <a:lnSpc>
+                          <a:spcPct val="100000"/>
+                        </a:lnSpc>
+                      </a:pPr>
+                      <a:r>
+                        <a:rPr sz="1000" b="1">
+                          <a:solidFill>
+                            <a:srgbClr val="58595B"/>
+                          </a:solidFill>
+                          <a:latin typeface="IBM Plex Sans"/>
+                        </a:rPr>
+                        <a:t>KKW-Revisionen 2027 (Beznau, Leibstadt, Gösgen)</a:t>
+                      </a:r>
+                    </a:p>
+                  </a:txBody>
+                  <a:tcPr marL="109728" marR="91440" marT="45720" marB="45720" anchor="ctr">
+                    <a:solidFill>
+                      <a:srgbClr val="FFFFFF"/>
+                    </a:solidFill>
+                  </a:tcPr>
+                </a:tc>
+                <a:tc>
+                  <a:txBody>
+                    <a:bodyPr wrap="square"/>
+                    <a:lstStyle/>
+                    <a:p>
+                      <a:pPr>
+                        <a:lnSpc>
+                          <a:spcPct val="100000"/>
+                        </a:lnSpc>
+                      </a:pPr>
+                      <a:r>
+                        <a:rPr sz="1000" b="0">
+                          <a:solidFill>
+                            <a:srgbClr val="58595B"/>
+                          </a:solidFill>
+                          <a:latin typeface="IBM Plex Sans"/>
+                        </a:rPr>
+                        <a:t>Axpo / KKL / KKG</a:t>
+                      </a:r>
+                    </a:p>
+                  </a:txBody>
+                  <a:tcPr marL="109728" marR="91440" marT="45720" marB="45720" anchor="ctr">
+                    <a:solidFill>
+                      <a:srgbClr val="FFFFFF"/>
+                    </a:solidFill>
+                  </a:tcPr>
+                </a:tc>
+                <a:tc>
+                  <a:txBody>
+                    <a:bodyPr wrap="square"/>
+                    <a:lstStyle/>
+                    <a:p>
+                      <a:pPr>
+                        <a:lnSpc>
+                          <a:spcPct val="100000"/>
+                        </a:lnSpc>
+                      </a:pPr>
+                      <a:r>
+                        <a:rPr sz="1000" b="0">
+                          <a:solidFill>
+                            <a:srgbClr val="58595B"/>
+                          </a:solidFill>
+                          <a:latin typeface="IBM Plex Sans"/>
+                        </a:rPr>
+                        <a:t>114'500</a:t>
+                      </a:r>
+                    </a:p>
+                  </a:txBody>
+                  <a:tcPr marL="109728" marR="91440" marT="45720" marB="45720" anchor="ctr">
+                    <a:solidFill>
+                      <a:srgbClr val="FFFFFF"/>
+                    </a:solidFill>
+                  </a:tcPr>
+                </a:tc>
+                <a:tc>
+                  <a:txBody>
+                    <a:bodyPr wrap="square"/>
+                    <a:lstStyle/>
+                    <a:p>
+                      <a:pPr>
+                        <a:lnSpc>
+                          <a:spcPct val="100000"/>
+                        </a:lnSpc>
+                      </a:pPr>
+                      <a:r>
+                        <a:rPr sz="1000" b="0">
+                          <a:solidFill>
+                            <a:srgbClr val="58595B"/>
+                          </a:solidFill>
+                          <a:latin typeface="IBM Plex Sans"/>
+                        </a:rPr>
+                        <a:t>11'400</a:t>
+                      </a:r>
+                    </a:p>
+                  </a:txBody>
+                  <a:tcPr marL="109728" marR="91440" marT="45720" marB="45720" anchor="ctr">
+                    <a:solidFill>
+                      <a:srgbClr val="FFFFFF"/>
+                    </a:solidFill>
+                  </a:tcPr>
+                </a:tc>
+              </a:tr>
+              <a:tr h="329184">
+                <a:tc>
+                  <a:txBody>
+                    <a:bodyPr wrap="square"/>
+                    <a:lstStyle/>
+                    <a:p>
+                      <a:pPr>
+                        <a:lnSpc>
+                          <a:spcPct val="100000"/>
+                        </a:lnSpc>
+                      </a:pPr>
+                      <a:r>
+                        <a:rPr sz="1000" b="1">
+                          <a:solidFill>
+                            <a:srgbClr val="58595B"/>
+                          </a:solidFill>
+                          <a:latin typeface="IBM Plex Sans"/>
+                        </a:rPr>
+                        <a:t>Reservekraftwerk Sisslerfeld 1 und Stein (HVO)</a:t>
+                      </a:r>
+                    </a:p>
+                  </a:txBody>
+                  <a:tcPr marL="109728" marR="91440" marT="45720" marB="45720" anchor="ctr">
+                    <a:solidFill>
+                      <a:srgbClr val="F4F4F4"/>
+                    </a:solidFill>
+                  </a:tcPr>
+                </a:tc>
+                <a:tc>
+                  <a:txBody>
+                    <a:bodyPr wrap="square"/>
+                    <a:lstStyle/>
+                    <a:p>
+                      <a:pPr>
+                        <a:lnSpc>
+                          <a:spcPct val="100000"/>
+                        </a:lnSpc>
+                      </a:pPr>
+                      <a:r>
+                        <a:rPr sz="1000" b="0">
+                          <a:solidFill>
+                            <a:srgbClr val="58595B"/>
+                          </a:solidFill>
+                          <a:latin typeface="IBM Plex Sans"/>
+                        </a:rPr>
+                        <a:t>GETEC</a:t>
+                      </a:r>
+                    </a:p>
+                  </a:txBody>
+                  <a:tcPr marL="109728" marR="91440" marT="45720" marB="45720" anchor="ctr">
+                    <a:solidFill>
+                      <a:srgbClr val="F4F4F4"/>
+                    </a:solidFill>
+                  </a:tcPr>
+                </a:tc>
+                <a:tc>
+                  <a:txBody>
+                    <a:bodyPr wrap="square"/>
+                    <a:lstStyle/>
+                    <a:p>
+                      <a:pPr>
+                        <a:lnSpc>
+                          <a:spcPct val="100000"/>
+                        </a:lnSpc>
+                      </a:pPr>
+                      <a:r>
+                        <a:rPr sz="1000" b="0">
+                          <a:solidFill>
+                            <a:srgbClr val="58595B"/>
+                          </a:solidFill>
+                          <a:latin typeface="IBM Plex Sans"/>
+                        </a:rPr>
+                        <a:t>67'500</a:t>
+                      </a:r>
+                    </a:p>
+                  </a:txBody>
+                  <a:tcPr marL="109728" marR="91440" marT="45720" marB="45720" anchor="ctr">
+                    <a:solidFill>
+                      <a:srgbClr val="F4F4F4"/>
+                    </a:solidFill>
+                  </a:tcPr>
+                </a:tc>
+                <a:tc>
+                  <a:txBody>
+                    <a:bodyPr wrap="square"/>
+                    <a:lstStyle/>
+                    <a:p>
+                      <a:pPr>
+                        <a:lnSpc>
+                          <a:spcPct val="100000"/>
+                        </a:lnSpc>
+                      </a:pPr>
+                      <a:r>
+                        <a:rPr sz="1000" b="0">
+                          <a:solidFill>
+                            <a:srgbClr val="58595B"/>
+                          </a:solidFill>
+                          <a:latin typeface="IBM Plex Sans"/>
+                        </a:rPr>
+                        <a:t>10'800</a:t>
+                      </a:r>
+                    </a:p>
+                  </a:txBody>
+                  <a:tcPr marL="109728" marR="91440" marT="45720" marB="45720" anchor="ctr">
+                    <a:solidFill>
+                      <a:srgbClr val="F4F4F4"/>
+                    </a:solidFill>
+                  </a:tcPr>
+                </a:tc>
+              </a:tr>
+              <a:tr h="329184">
+                <a:tc>
+                  <a:txBody>
+                    <a:bodyPr wrap="square"/>
+                    <a:lstStyle/>
+                    <a:p>
+                      <a:pPr>
+                        <a:lnSpc>
+                          <a:spcPct val="100000"/>
+                        </a:lnSpc>
+                      </a:pPr>
+                      <a:r>
+                        <a:rPr sz="1000" b="1">
+                          <a:solidFill>
+                            <a:srgbClr val="58595B"/>
+                          </a:solidFill>
+                          <a:latin typeface="IBM Plex Sans"/>
+                        </a:rPr>
+                        <a:t>UW Mörel (380-kV-GIS, neuer Trafo)</a:t>
+                      </a:r>
+                    </a:p>
+                  </a:txBody>
+                  <a:tcPr marL="109728" marR="91440" marT="45720" marB="45720" anchor="ctr">
+                    <a:solidFill>
+                      <a:srgbClr val="FFFFFF"/>
+                    </a:solidFill>
+                  </a:tcPr>
+                </a:tc>
+                <a:tc>
+                  <a:txBody>
+                    <a:bodyPr wrap="square"/>
+                    <a:lstStyle/>
+                    <a:p>
+                      <a:pPr>
+                        <a:lnSpc>
+                          <a:spcPct val="100000"/>
+                        </a:lnSpc>
+                      </a:pPr>
+                      <a:r>
+                        <a:rPr sz="1000" b="0">
+                          <a:solidFill>
+                            <a:srgbClr val="58595B"/>
+                          </a:solidFill>
+                          <a:latin typeface="IBM Plex Sans"/>
+                        </a:rPr>
+                        <a:t>Swissgrid</a:t>
+                      </a:r>
+                    </a:p>
+                  </a:txBody>
+                  <a:tcPr marL="109728" marR="91440" marT="45720" marB="45720" anchor="ctr">
+                    <a:solidFill>
+                      <a:srgbClr val="FFFFFF"/>
+                    </a:solidFill>
+                  </a:tcPr>
+                </a:tc>
+                <a:tc>
+                  <a:txBody>
+                    <a:bodyPr wrap="square"/>
+                    <a:lstStyle/>
+                    <a:p>
+                      <a:pPr>
+                        <a:lnSpc>
+                          <a:spcPct val="100000"/>
+                        </a:lnSpc>
+                      </a:pPr>
+                      <a:r>
+                        <a:rPr sz="1000" b="0">
+                          <a:solidFill>
+                            <a:srgbClr val="58595B"/>
+                          </a:solidFill>
+                          <a:latin typeface="IBM Plex Sans"/>
+                        </a:rPr>
+                        <a:t>118'000</a:t>
+                      </a:r>
+                    </a:p>
+                  </a:txBody>
+                  <a:tcPr marL="109728" marR="91440" marT="45720" marB="45720" anchor="ctr">
+                    <a:solidFill>
+                      <a:srgbClr val="FFFFFF"/>
+                    </a:solidFill>
+                  </a:tcPr>
+                </a:tc>
+                <a:tc>
+                  <a:txBody>
+                    <a:bodyPr wrap="square"/>
+                    <a:lstStyle/>
+                    <a:p>
+                      <a:pPr>
+                        <a:lnSpc>
+                          <a:spcPct val="100000"/>
+                        </a:lnSpc>
+                      </a:pPr>
+                      <a:r>
+                        <a:rPr sz="1000" b="0">
+                          <a:solidFill>
+                            <a:srgbClr val="58595B"/>
+                          </a:solidFill>
+                          <a:latin typeface="IBM Plex Sans"/>
+                        </a:rPr>
+                        <a:t>10'600</a:t>
+                      </a:r>
+                    </a:p>
+                  </a:txBody>
+                  <a:tcPr marL="109728" marR="91440" marT="45720" marB="45720" anchor="ctr">
+                    <a:solidFill>
+                      <a:srgbClr val="FFFFFF"/>
+                    </a:solidFill>
+                  </a:tcPr>
+                </a:tc>
+              </a:tr>
+              <a:tr h="329184">
+                <a:tc>
+                  <a:txBody>
+                    <a:bodyPr wrap="square"/>
+                    <a:lstStyle/>
+                    <a:p>
+                      <a:pPr>
+                        <a:lnSpc>
+                          <a:spcPct val="100000"/>
+                        </a:lnSpc>
+                      </a:pPr>
+                      <a:r>
+                        <a:rPr sz="1000" b="1">
+                          <a:solidFill>
+                            <a:srgbClr val="58595B"/>
+                          </a:solidFill>
+                          <a:latin typeface="IBM Plex Sans"/>
+                        </a:rPr>
+                        <a:t>Romande Energie: UW-Modernisierung HS/MS</a:t>
+                      </a:r>
+                    </a:p>
+                  </a:txBody>
+                  <a:tcPr marL="109728" marR="91440" marT="45720" marB="45720" anchor="ctr">
+                    <a:solidFill>
+                      <a:srgbClr val="F4F4F4"/>
+                    </a:solidFill>
+                  </a:tcPr>
+                </a:tc>
+                <a:tc>
+                  <a:txBody>
+                    <a:bodyPr wrap="square"/>
+                    <a:lstStyle/>
+                    <a:p>
+                      <a:pPr>
+                        <a:lnSpc>
+                          <a:spcPct val="100000"/>
+                        </a:lnSpc>
+                      </a:pPr>
+                      <a:r>
+                        <a:rPr sz="1000" b="0">
+                          <a:solidFill>
+                            <a:srgbClr val="58595B"/>
+                          </a:solidFill>
+                          <a:latin typeface="IBM Plex Sans"/>
+                        </a:rPr>
+                        <a:t>Romande Energie</a:t>
+                      </a:r>
+                    </a:p>
+                  </a:txBody>
+                  <a:tcPr marL="109728" marR="91440" marT="45720" marB="45720" anchor="ctr">
+                    <a:solidFill>
+                      <a:srgbClr val="F4F4F4"/>
+                    </a:solidFill>
+                  </a:tcPr>
+                </a:tc>
+                <a:tc>
+                  <a:txBody>
+                    <a:bodyPr wrap="square"/>
+                    <a:lstStyle/>
+                    <a:p>
+                      <a:pPr>
+                        <a:lnSpc>
+                          <a:spcPct val="100000"/>
+                        </a:lnSpc>
+                      </a:pPr>
+                      <a:r>
+                        <a:rPr sz="1000" b="0">
+                          <a:solidFill>
+                            <a:srgbClr val="58595B"/>
+                          </a:solidFill>
+                          <a:latin typeface="IBM Plex Sans"/>
+                        </a:rPr>
+                        <a:t>50'900</a:t>
+                      </a:r>
+                    </a:p>
+                  </a:txBody>
+                  <a:tcPr marL="109728" marR="91440" marT="45720" marB="45720" anchor="ctr">
+                    <a:solidFill>
+                      <a:srgbClr val="F4F4F4"/>
+                    </a:solidFill>
+                  </a:tcPr>
+                </a:tc>
+                <a:tc>
+                  <a:txBody>
+                    <a:bodyPr wrap="square"/>
+                    <a:lstStyle/>
+                    <a:p>
+                      <a:pPr>
+                        <a:lnSpc>
+                          <a:spcPct val="100000"/>
+                        </a:lnSpc>
+                      </a:pPr>
+                      <a:r>
+                        <a:rPr sz="1000" b="0">
+                          <a:solidFill>
+                            <a:srgbClr val="58595B"/>
+                          </a:solidFill>
+                          <a:latin typeface="IBM Plex Sans"/>
+                        </a:rPr>
+                        <a:t>10'200</a:t>
+                      </a:r>
+                    </a:p>
+                  </a:txBody>
+                  <a:tcPr marL="109728" marR="91440" marT="45720" marB="45720" anchor="ctr">
+                    <a:solidFill>
+                      <a:srgbClr val="F4F4F4"/>
+                    </a:solidFill>
+                  </a:tcPr>
+                </a:tc>
+              </a:tr>
+              <a:tr h="329184">
+                <a:tc>
+                  <a:txBody>
+                    <a:bodyPr wrap="square"/>
+                    <a:lstStyle/>
+                    <a:p>
+                      <a:pPr>
+                        <a:lnSpc>
+                          <a:spcPct val="100000"/>
+                        </a:lnSpc>
+                      </a:pPr>
+                      <a:r>
+                        <a:rPr sz="1000" b="1">
+                          <a:solidFill>
+                            <a:srgbClr val="58595B"/>
+                          </a:solidFill>
+                          <a:latin typeface="IBM Plex Sans"/>
+                        </a:rPr>
+                        <a:t>Kraftwerk Ritom (Neubau)</a:t>
+                      </a:r>
+                    </a:p>
+                  </a:txBody>
+                  <a:tcPr marL="109728" marR="91440" marT="45720" marB="45720" anchor="ctr">
+                    <a:solidFill>
+                      <a:srgbClr val="FFFFFF"/>
+                    </a:solidFill>
+                  </a:tcPr>
+                </a:tc>
+                <a:tc>
+                  <a:txBody>
+                    <a:bodyPr wrap="square"/>
+                    <a:lstStyle/>
+                    <a:p>
+                      <a:pPr>
+                        <a:lnSpc>
+                          <a:spcPct val="100000"/>
+                        </a:lnSpc>
+                      </a:pPr>
+                      <a:r>
+                        <a:rPr sz="1000" b="0">
+                          <a:solidFill>
+                            <a:srgbClr val="58595B"/>
+                          </a:solidFill>
+                          <a:latin typeface="IBM Plex Sans"/>
+                        </a:rPr>
+                        <a:t>SBB / AET</a:t>
+                      </a:r>
+                    </a:p>
+                  </a:txBody>
+                  <a:tcPr marL="109728" marR="91440" marT="45720" marB="45720" anchor="ctr">
+                    <a:solidFill>
+                      <a:srgbClr val="FFFFFF"/>
+                    </a:solidFill>
+                  </a:tcPr>
+                </a:tc>
+                <a:tc>
+                  <a:txBody>
+                    <a:bodyPr wrap="square"/>
+                    <a:lstStyle/>
+                    <a:p>
+                      <a:pPr>
+                        <a:lnSpc>
+                          <a:spcPct val="100000"/>
+                        </a:lnSpc>
+                      </a:pPr>
+                      <a:r>
+                        <a:rPr sz="1000" b="0">
+                          <a:solidFill>
+                            <a:srgbClr val="58595B"/>
+                          </a:solidFill>
+                          <a:latin typeface="IBM Plex Sans"/>
+                        </a:rPr>
+                        <a:t>50'900</a:t>
+                      </a:r>
+                    </a:p>
+                  </a:txBody>
+                  <a:tcPr marL="109728" marR="91440" marT="45720" marB="45720" anchor="ctr">
+                    <a:solidFill>
+                      <a:srgbClr val="FFFFFF"/>
+                    </a:solidFill>
+                  </a:tcPr>
+                </a:tc>
+                <a:tc>
+                  <a:txBody>
+                    <a:bodyPr wrap="square"/>
+                    <a:lstStyle/>
+                    <a:p>
+                      <a:pPr>
+                        <a:lnSpc>
+                          <a:spcPct val="100000"/>
+                        </a:lnSpc>
+                      </a:pPr>
+                      <a:r>
+                        <a:rPr sz="1000" b="0">
+                          <a:solidFill>
+                            <a:srgbClr val="58595B"/>
+                          </a:solidFill>
+                          <a:latin typeface="IBM Plex Sans"/>
+                        </a:rPr>
+                        <a:t>7'600</a:t>
+                      </a:r>
+                    </a:p>
+                  </a:txBody>
+                  <a:tcPr marL="109728" marR="91440" marT="45720" marB="45720" anchor="ctr">
+                    <a:solidFill>
+                      <a:srgbClr val="FFFFFF"/>
+                    </a:solidFill>
+                  </a:tcPr>
+                </a:tc>
+              </a:tr>
+            </a:tbl>
+          </a:graphicData>
+        </a:graphic>
+      </p:graphicFrame>
       <p:pic>
         <p:nvPicPr>
-          <p:cNvPr id="7" name="Picture 6" descr="event.png"/>
+          <p:cNvPr id="8" name="Picture 7" descr="foto_trafo.jpg"/>
           <p:cNvPicPr>
             <a:picLocks noChangeAspect="1"/>
           </p:cNvPicPr>
@@ -11133,15 +12615,15 @@
         </p:nvPicPr>
         <p:blipFill>
           <a:blip r:embed="rId2"/>
-          <a:srcRect l="11739" r="17609"/>
+          <a:srcRect t="9600" b="11733"/>
           <a:stretch>
             <a:fillRect/>
           </a:stretch>
         </p:blipFill>
         <p:spPr>
           <a:xfrm>
-            <a:off x="429768" y="1874519"/>
-            <a:ext cx="3566160" cy="3154680"/>
+            <a:off x="8503920" y="1874519"/>
+            <a:ext cx="2834640" cy="1874519"/>
           </a:xfrm>
           <a:prstGeom prst="rect">
             <a:avLst/>
@@ -11153,14 +12635,14 @@
       </p:pic>
       <p:sp>
         <p:nvSpPr>
-          <p:cNvPr id="8" name="Rectangle 7"/>
+          <p:cNvPr id="9" name="Rectangle 8"/>
           <p:cNvSpPr/>
           <p:nvPr/>
         </p:nvSpPr>
         <p:spPr>
           <a:xfrm>
-            <a:off x="4206240" y="1874519"/>
-            <a:ext cx="7132320" cy="987552"/>
+            <a:off x="8503920" y="3886200"/>
+            <a:ext cx="2834640" cy="2103120"/>
           </a:xfrm>
           <a:prstGeom prst="rect">
             <a:avLst/>
@@ -11197,14 +12679,14 @@
       </p:sp>
       <p:sp>
         <p:nvSpPr>
-          <p:cNvPr id="9" name="TextBox 8"/>
+          <p:cNvPr id="10" name="TextBox 9"/>
           <p:cNvSpPr txBox="1"/>
           <p:nvPr/>
         </p:nvSpPr>
         <p:spPr>
           <a:xfrm>
-            <a:off x="4434840" y="2002536"/>
-            <a:ext cx="3931920" cy="365760"/>
+            <a:off x="8686800" y="4041648"/>
+            <a:ext cx="2514600" cy="365760"/>
           </a:xfrm>
           <a:prstGeom prst="rect">
             <a:avLst/>
@@ -11229,27 +12711,27 @@
               </a:spcAft>
             </a:pPr>
             <a:r>
-              <a:rPr sz="1400" b="1">
+              <a:rPr sz="1800" b="1">
                 <a:solidFill>
                   <a:srgbClr val="FFFFFF"/>
                 </a:solidFill>
-                <a:latin typeface="IBM Plex Sans"/>
+                <a:latin typeface="Alata"/>
               </a:rPr>
-              <a:t>FIS Ski-WM Crans-Montana 2027</a:t>
-            </a:r>
-          </a:p>
-        </p:txBody>
-      </p:sp>
-      <p:sp>
-        <p:nvSpPr>
-          <p:cNvPr id="10" name="TextBox 9"/>
+              <a:t>1,4 Mio. CHF</a:t>
+            </a:r>
+          </a:p>
+        </p:txBody>
+      </p:sp>
+      <p:sp>
+        <p:nvSpPr>
+          <p:cNvPr id="11" name="TextBox 10"/>
           <p:cNvSpPr txBox="1"/>
           <p:nvPr/>
         </p:nvSpPr>
         <p:spPr>
           <a:xfrm>
-            <a:off x="4434840" y="2350008"/>
-            <a:ext cx="4206240" cy="457200"/>
+            <a:off x="8686800" y="4526280"/>
+            <a:ext cx="2514600" cy="1371600"/>
           </a:xfrm>
           <a:prstGeom prst="rect">
             <a:avLst/>
@@ -11280,628 +12762,29 @@
                 </a:solidFill>
                 <a:latin typeface="IBM Plex Sans"/>
               </a:rPr>
-              <a:t>01. bis 14.02.2027 · Broadcast, Fan-Zonen, Hospitality</a:t>
-            </a:r>
-          </a:p>
-        </p:txBody>
-      </p:sp>
-      <p:sp>
-        <p:nvSpPr>
-          <p:cNvPr id="11" name="TextBox 10"/>
-          <p:cNvSpPr txBox="1"/>
-          <p:nvPr/>
-        </p:nvSpPr>
-        <p:spPr>
-          <a:xfrm>
-            <a:off x="8778240" y="2002536"/>
-            <a:ext cx="2377440" cy="365760"/>
-          </a:xfrm>
-          <a:prstGeom prst="rect">
-            <a:avLst/>
-          </a:prstGeom>
-          <a:noFill/>
-        </p:spPr>
-        <p:txBody>
-          <a:bodyPr wrap="square" lIns="0" rIns="0" tIns="0" bIns="0" anchor="t">
-            <a:spAutoFit/>
-          </a:bodyPr>
-          <a:lstStyle/>
-          <a:p>
-            <a:pPr algn="r">
+              <a:t>Potenzial brutto im Segment.</a:t>
+            </a:r>
+          </a:p>
+          <a:p>
+            <a:pPr algn="l">
               <a:lnSpc>
                 <a:spcPct val="105000"/>
               </a:lnSpc>
               <a:spcBef>
-                <a:spcPts val="0"/>
+                <a:spcPts val="300"/>
               </a:spcBef>
               <a:spcAft>
                 <a:spcPts val="0"/>
               </a:spcAft>
             </a:pPr>
             <a:r>
-              <a:rPr sz="1600" b="1">
-                <a:solidFill>
-                  <a:srgbClr val="FFFFFF"/>
-                </a:solidFill>
-                <a:latin typeface="Alata"/>
-              </a:rPr>
-              <a:t>CHF 63'300</a:t>
-            </a:r>
-          </a:p>
-        </p:txBody>
-      </p:sp>
-      <p:sp>
-        <p:nvSpPr>
-          <p:cNvPr id="12" name="TextBox 11"/>
-          <p:cNvSpPr txBox="1"/>
-          <p:nvPr/>
-        </p:nvSpPr>
-        <p:spPr>
-          <a:xfrm>
-            <a:off x="8778240" y="2404872"/>
-            <a:ext cx="2377440" cy="365760"/>
-          </a:xfrm>
-          <a:prstGeom prst="rect">
-            <a:avLst/>
-          </a:prstGeom>
-          <a:noFill/>
-        </p:spPr>
-        <p:txBody>
-          <a:bodyPr wrap="square" lIns="0" rIns="0" tIns="0" bIns="0" anchor="t">
-            <a:spAutoFit/>
-          </a:bodyPr>
-          <a:lstStyle/>
-          <a:p>
-            <a:pPr algn="r">
-              <a:lnSpc>
-                <a:spcPct val="105000"/>
-              </a:lnSpc>
-              <a:spcBef>
-                <a:spcPts val="0"/>
-              </a:spcBef>
-              <a:spcAft>
-                <a:spcPts val="0"/>
-              </a:spcAft>
-            </a:pPr>
-            <a:r>
-              <a:rPr sz="1050" b="0">
+              <a:rPr sz="1100" b="0">
                 <a:solidFill>
                   <a:srgbClr val="FFFFFF"/>
                 </a:solidFill>
                 <a:latin typeface="IBM Plex Sans"/>
               </a:rPr>
-              <a:t>Offerte auf Französisch</a:t>
-            </a:r>
-          </a:p>
-        </p:txBody>
-      </p:sp>
-      <p:sp>
-        <p:nvSpPr>
-          <p:cNvPr id="13" name="Rectangle 12"/>
-          <p:cNvSpPr/>
-          <p:nvPr/>
-        </p:nvSpPr>
-        <p:spPr>
-          <a:xfrm>
-            <a:off x="4206240" y="2953511"/>
-            <a:ext cx="7132320" cy="987552"/>
-          </a:xfrm>
-          <a:prstGeom prst="rect">
-            <a:avLst/>
-          </a:prstGeom>
-          <a:solidFill>
-            <a:srgbClr val="58595B"/>
-          </a:solidFill>
-          <a:ln>
-            <a:noFill/>
-          </a:ln>
-          <a:effectLst/>
-        </p:spPr>
-        <p:style>
-          <a:lnRef idx="1">
-            <a:schemeClr val="accent1"/>
-          </a:lnRef>
-          <a:fillRef idx="3">
-            <a:schemeClr val="accent1"/>
-          </a:fillRef>
-          <a:effectRef idx="2">
-            <a:schemeClr val="accent1"/>
-          </a:effectRef>
-          <a:fontRef idx="minor">
-            <a:schemeClr val="lt1"/>
-          </a:fontRef>
-        </p:style>
-        <p:txBody>
-          <a:bodyPr rtlCol="0" anchor="ctr" wrap="square"/>
-          <a:lstStyle/>
-          <a:p>
-            <a:pPr algn="ctr"/>
-          </a:p>
-        </p:txBody>
-      </p:sp>
-      <p:sp>
-        <p:nvSpPr>
-          <p:cNvPr id="14" name="TextBox 13"/>
-          <p:cNvSpPr txBox="1"/>
-          <p:nvPr/>
-        </p:nvSpPr>
-        <p:spPr>
-          <a:xfrm>
-            <a:off x="4434840" y="3081527"/>
-            <a:ext cx="3931920" cy="365760"/>
-          </a:xfrm>
-          <a:prstGeom prst="rect">
-            <a:avLst/>
-          </a:prstGeom>
-          <a:noFill/>
-        </p:spPr>
-        <p:txBody>
-          <a:bodyPr wrap="square" lIns="0" rIns="0" tIns="0" bIns="0" anchor="t">
-            <a:spAutoFit/>
-          </a:bodyPr>
-          <a:lstStyle/>
-          <a:p>
-            <a:pPr algn="l">
-              <a:lnSpc>
-                <a:spcPct val="105000"/>
-              </a:lnSpc>
-              <a:spcBef>
-                <a:spcPts val="0"/>
-              </a:spcBef>
-              <a:spcAft>
-                <a:spcPts val="0"/>
-              </a:spcAft>
-            </a:pPr>
-            <a:r>
-              <a:rPr sz="1400" b="1">
-                <a:solidFill>
-                  <a:srgbClr val="FFFFFF"/>
-                </a:solidFill>
-                <a:latin typeface="IBM Plex Sans"/>
-              </a:rPr>
-              <a:t>WEF 2027</a:t>
-            </a:r>
-          </a:p>
-        </p:txBody>
-      </p:sp>
-      <p:sp>
-        <p:nvSpPr>
-          <p:cNvPr id="15" name="TextBox 14"/>
-          <p:cNvSpPr txBox="1"/>
-          <p:nvPr/>
-        </p:nvSpPr>
-        <p:spPr>
-          <a:xfrm>
-            <a:off x="4434840" y="3428999"/>
-            <a:ext cx="4206240" cy="457200"/>
-          </a:xfrm>
-          <a:prstGeom prst="rect">
-            <a:avLst/>
-          </a:prstGeom>
-          <a:noFill/>
-        </p:spPr>
-        <p:txBody>
-          <a:bodyPr wrap="square" lIns="0" rIns="0" tIns="0" bIns="0" anchor="t">
-            <a:spAutoFit/>
-          </a:bodyPr>
-          <a:lstStyle/>
-          <a:p>
-            <a:pPr algn="l">
-              <a:lnSpc>
-                <a:spcPct val="105000"/>
-              </a:lnSpc>
-              <a:spcBef>
-                <a:spcPts val="0"/>
-              </a:spcBef>
-              <a:spcAft>
-                <a:spcPts val="0"/>
-              </a:spcAft>
-            </a:pPr>
-            <a:r>
-              <a:rPr sz="1100" b="0">
-                <a:solidFill>
-                  <a:srgbClr val="E6E6E6"/>
-                </a:solidFill>
-                <a:latin typeface="IBM Plex Sans"/>
-              </a:rPr>
-              <a:t>18. bis 22.01.2027, Davos · Pavillons und Sicherheit bei knappem Ortsnetz</a:t>
-            </a:r>
-          </a:p>
-        </p:txBody>
-      </p:sp>
-      <p:sp>
-        <p:nvSpPr>
-          <p:cNvPr id="16" name="TextBox 15"/>
-          <p:cNvSpPr txBox="1"/>
-          <p:nvPr/>
-        </p:nvSpPr>
-        <p:spPr>
-          <a:xfrm>
-            <a:off x="8778240" y="3081527"/>
-            <a:ext cx="2377440" cy="365760"/>
-          </a:xfrm>
-          <a:prstGeom prst="rect">
-            <a:avLst/>
-          </a:prstGeom>
-          <a:noFill/>
-        </p:spPr>
-        <p:txBody>
-          <a:bodyPr wrap="square" lIns="0" rIns="0" tIns="0" bIns="0" anchor="t">
-            <a:spAutoFit/>
-          </a:bodyPr>
-          <a:lstStyle/>
-          <a:p>
-            <a:pPr algn="r">
-              <a:lnSpc>
-                <a:spcPct val="105000"/>
-              </a:lnSpc>
-              <a:spcBef>
-                <a:spcPts val="0"/>
-              </a:spcBef>
-              <a:spcAft>
-                <a:spcPts val="0"/>
-              </a:spcAft>
-            </a:pPr>
-            <a:r>
-              <a:rPr sz="1600" b="1">
-                <a:solidFill>
-                  <a:srgbClr val="FFFFFF"/>
-                </a:solidFill>
-                <a:latin typeface="Alata"/>
-              </a:rPr>
-              <a:t>CHF 75'700</a:t>
-            </a:r>
-          </a:p>
-        </p:txBody>
-      </p:sp>
-      <p:sp>
-        <p:nvSpPr>
-          <p:cNvPr id="17" name="TextBox 16"/>
-          <p:cNvSpPr txBox="1"/>
-          <p:nvPr/>
-        </p:nvSpPr>
-        <p:spPr>
-          <a:xfrm>
-            <a:off x="8778240" y="3483863"/>
-            <a:ext cx="2377440" cy="365760"/>
-          </a:xfrm>
-          <a:prstGeom prst="rect">
-            <a:avLst/>
-          </a:prstGeom>
-          <a:noFill/>
-        </p:spPr>
-        <p:txBody>
-          <a:bodyPr wrap="square" lIns="0" rIns="0" tIns="0" bIns="0" anchor="t">
-            <a:spAutoFit/>
-          </a:bodyPr>
-          <a:lstStyle/>
-          <a:p>
-            <a:pPr algn="r">
-              <a:lnSpc>
-                <a:spcPct val="105000"/>
-              </a:lnSpc>
-              <a:spcBef>
-                <a:spcPts val="0"/>
-              </a:spcBef>
-              <a:spcAft>
-                <a:spcPts val="0"/>
-              </a:spcAft>
-            </a:pPr>
-            <a:r>
-              <a:rPr sz="1050" b="0">
-                <a:solidFill>
-                  <a:srgbClr val="E6E6E6"/>
-                </a:solidFill>
-                <a:latin typeface="IBM Plex Sans"/>
-              </a:rPr>
-              <a:t>Aufbau ab Dezember</a:t>
-            </a:r>
-          </a:p>
-        </p:txBody>
-      </p:sp>
-      <p:sp>
-        <p:nvSpPr>
-          <p:cNvPr id="18" name="Rectangle 17"/>
-          <p:cNvSpPr/>
-          <p:nvPr/>
-        </p:nvSpPr>
-        <p:spPr>
-          <a:xfrm>
-            <a:off x="4206240" y="4032504"/>
-            <a:ext cx="7132320" cy="987552"/>
-          </a:xfrm>
-          <a:prstGeom prst="rect">
-            <a:avLst/>
-          </a:prstGeom>
-          <a:solidFill>
-            <a:srgbClr val="58595B"/>
-          </a:solidFill>
-          <a:ln>
-            <a:noFill/>
-          </a:ln>
-          <a:effectLst/>
-        </p:spPr>
-        <p:style>
-          <a:lnRef idx="1">
-            <a:schemeClr val="accent1"/>
-          </a:lnRef>
-          <a:fillRef idx="3">
-            <a:schemeClr val="accent1"/>
-          </a:fillRef>
-          <a:effectRef idx="2">
-            <a:schemeClr val="accent1"/>
-          </a:effectRef>
-          <a:fontRef idx="minor">
-            <a:schemeClr val="lt1"/>
-          </a:fontRef>
-        </p:style>
-        <p:txBody>
-          <a:bodyPr rtlCol="0" anchor="ctr" wrap="square"/>
-          <a:lstStyle/>
-          <a:p>
-            <a:pPr algn="ctr"/>
-          </a:p>
-        </p:txBody>
-      </p:sp>
-      <p:sp>
-        <p:nvSpPr>
-          <p:cNvPr id="19" name="TextBox 18"/>
-          <p:cNvSpPr txBox="1"/>
-          <p:nvPr/>
-        </p:nvSpPr>
-        <p:spPr>
-          <a:xfrm>
-            <a:off x="4434840" y="4160520"/>
-            <a:ext cx="3931920" cy="365760"/>
-          </a:xfrm>
-          <a:prstGeom prst="rect">
-            <a:avLst/>
-          </a:prstGeom>
-          <a:noFill/>
-        </p:spPr>
-        <p:txBody>
-          <a:bodyPr wrap="square" lIns="0" rIns="0" tIns="0" bIns="0" anchor="t">
-            <a:spAutoFit/>
-          </a:bodyPr>
-          <a:lstStyle/>
-          <a:p>
-            <a:pPr algn="l">
-              <a:lnSpc>
-                <a:spcPct val="105000"/>
-              </a:lnSpc>
-              <a:spcBef>
-                <a:spcPts val="0"/>
-              </a:spcBef>
-              <a:spcAft>
-                <a:spcPts val="0"/>
-              </a:spcAft>
-            </a:pPr>
-            <a:r>
-              <a:rPr sz="1400" b="1">
-                <a:solidFill>
-                  <a:srgbClr val="FFFFFF"/>
-                </a:solidFill>
-                <a:latin typeface="IBM Plex Sans"/>
-              </a:rPr>
-              <a:t>ESAF 2028 Thun</a:t>
-            </a:r>
-          </a:p>
-        </p:txBody>
-      </p:sp>
-      <p:sp>
-        <p:nvSpPr>
-          <p:cNvPr id="20" name="TextBox 19"/>
-          <p:cNvSpPr txBox="1"/>
-          <p:nvPr/>
-        </p:nvSpPr>
-        <p:spPr>
-          <a:xfrm>
-            <a:off x="4434840" y="4507992"/>
-            <a:ext cx="4206240" cy="457200"/>
-          </a:xfrm>
-          <a:prstGeom prst="rect">
-            <a:avLst/>
-          </a:prstGeom>
-          <a:noFill/>
-        </p:spPr>
-        <p:txBody>
-          <a:bodyPr wrap="square" lIns="0" rIns="0" tIns="0" bIns="0" anchor="t">
-            <a:spAutoFit/>
-          </a:bodyPr>
-          <a:lstStyle/>
-          <a:p>
-            <a:pPr algn="l">
-              <a:lnSpc>
-                <a:spcPct val="105000"/>
-              </a:lnSpc>
-              <a:spcBef>
-                <a:spcPts val="0"/>
-              </a:spcBef>
-              <a:spcAft>
-                <a:spcPts val="0"/>
-              </a:spcAft>
-            </a:pPr>
-            <a:r>
-              <a:rPr sz="1100" b="0">
-                <a:solidFill>
-                  <a:srgbClr val="E6E6E6"/>
-                </a:solidFill>
-                <a:latin typeface="IBM Plex Sans"/>
-              </a:rPr>
-              <a:t>25. bis 27.08.2028, Thuner Allmend · Arena, Festgelände, Camping</a:t>
-            </a:r>
-          </a:p>
-        </p:txBody>
-      </p:sp>
-      <p:sp>
-        <p:nvSpPr>
-          <p:cNvPr id="21" name="TextBox 20"/>
-          <p:cNvSpPr txBox="1"/>
-          <p:nvPr/>
-        </p:nvSpPr>
-        <p:spPr>
-          <a:xfrm>
-            <a:off x="8778240" y="4160520"/>
-            <a:ext cx="2377440" cy="365760"/>
-          </a:xfrm>
-          <a:prstGeom prst="rect">
-            <a:avLst/>
-          </a:prstGeom>
-          <a:noFill/>
-        </p:spPr>
-        <p:txBody>
-          <a:bodyPr wrap="square" lIns="0" rIns="0" tIns="0" bIns="0" anchor="t">
-            <a:spAutoFit/>
-          </a:bodyPr>
-          <a:lstStyle/>
-          <a:p>
-            <a:pPr algn="r">
-              <a:lnSpc>
-                <a:spcPct val="105000"/>
-              </a:lnSpc>
-              <a:spcBef>
-                <a:spcPts val="0"/>
-              </a:spcBef>
-              <a:spcAft>
-                <a:spcPts val="0"/>
-              </a:spcAft>
-            </a:pPr>
-            <a:r>
-              <a:rPr sz="1600" b="1">
-                <a:solidFill>
-                  <a:srgbClr val="FFFFFF"/>
-                </a:solidFill>
-                <a:latin typeface="Alata"/>
-              </a:rPr>
-              <a:t>CHF 92'700</a:t>
-            </a:r>
-          </a:p>
-        </p:txBody>
-      </p:sp>
-      <p:sp>
-        <p:nvSpPr>
-          <p:cNvPr id="22" name="TextBox 21"/>
-          <p:cNvSpPr txBox="1"/>
-          <p:nvPr/>
-        </p:nvSpPr>
-        <p:spPr>
-          <a:xfrm>
-            <a:off x="8778240" y="4562856"/>
-            <a:ext cx="2377440" cy="365760"/>
-          </a:xfrm>
-          <a:prstGeom prst="rect">
-            <a:avLst/>
-          </a:prstGeom>
-          <a:noFill/>
-        </p:spPr>
-        <p:txBody>
-          <a:bodyPr wrap="square" lIns="0" rIns="0" tIns="0" bIns="0" anchor="t">
-            <a:spAutoFit/>
-          </a:bodyPr>
-          <a:lstStyle/>
-          <a:p>
-            <a:pPr algn="r">
-              <a:lnSpc>
-                <a:spcPct val="105000"/>
-              </a:lnSpc>
-              <a:spcBef>
-                <a:spcPts val="0"/>
-              </a:spcBef>
-              <a:spcAft>
-                <a:spcPts val="0"/>
-              </a:spcAft>
-            </a:pPr>
-            <a:r>
-              <a:rPr sz="1050" b="0">
-                <a:solidFill>
-                  <a:srgbClr val="E6E6E6"/>
-                </a:solidFill>
-                <a:latin typeface="IBM Plex Sans"/>
-              </a:rPr>
-              <a:t>Konzept 2027, Umsatz 2028</a:t>
-            </a:r>
-          </a:p>
-        </p:txBody>
-      </p:sp>
-      <p:sp>
-        <p:nvSpPr>
-          <p:cNvPr id="23" name="Rectangle 22"/>
-          <p:cNvSpPr/>
-          <p:nvPr/>
-        </p:nvSpPr>
-        <p:spPr>
-          <a:xfrm>
-            <a:off x="429768" y="5257800"/>
-            <a:ext cx="10908792" cy="777240"/>
-          </a:xfrm>
-          <a:prstGeom prst="rect">
-            <a:avLst/>
-          </a:prstGeom>
-          <a:solidFill>
-            <a:srgbClr val="F2F2F2"/>
-          </a:solidFill>
-          <a:ln>
-            <a:noFill/>
-          </a:ln>
-          <a:effectLst/>
-        </p:spPr>
-        <p:style>
-          <a:lnRef idx="1">
-            <a:schemeClr val="accent1"/>
-          </a:lnRef>
-          <a:fillRef idx="3">
-            <a:schemeClr val="accent1"/>
-          </a:fillRef>
-          <a:effectRef idx="2">
-            <a:schemeClr val="accent1"/>
-          </a:effectRef>
-          <a:fontRef idx="minor">
-            <a:schemeClr val="lt1"/>
-          </a:fontRef>
-        </p:style>
-        <p:txBody>
-          <a:bodyPr rtlCol="0" anchor="ctr" wrap="square"/>
-          <a:lstStyle/>
-          <a:p>
-            <a:pPr algn="ctr"/>
-          </a:p>
-        </p:txBody>
-      </p:sp>
-      <p:sp>
-        <p:nvSpPr>
-          <p:cNvPr id="24" name="TextBox 23"/>
-          <p:cNvSpPr txBox="1"/>
-          <p:nvPr/>
-        </p:nvSpPr>
-        <p:spPr>
-          <a:xfrm>
-            <a:off x="841247" y="5504688"/>
-            <a:ext cx="10085832" cy="320040"/>
-          </a:xfrm>
-          <a:prstGeom prst="rect">
-            <a:avLst/>
-          </a:prstGeom>
-          <a:noFill/>
-        </p:spPr>
-        <p:txBody>
-          <a:bodyPr wrap="square" lIns="0" rIns="0" tIns="0" bIns="0" anchor="t">
-            <a:spAutoFit/>
-          </a:bodyPr>
-          <a:lstStyle/>
-          <a:p>
-            <a:pPr algn="l">
-              <a:lnSpc>
-                <a:spcPct val="105000"/>
-              </a:lnSpc>
-            </a:pPr>
-            <a:r>
-              <a:rPr sz="1250" b="0">
-                <a:solidFill>
-                  <a:srgbClr val="58595B"/>
-                </a:solidFill>
-                <a:latin typeface="IBM Plex Sans"/>
-              </a:rPr>
-              <a:t>Sommer-Openairs (St.Gallen, Frauenfeld, Gurten, Paléo, Montreux) liegen einzeln unter CHF 50'000: als Saisonpaket anbieten.</a:t>
+              <a:t>Dazu 25 kleinere EVU-Projekte im Excel-Blatt «EVU &amp; Energie 2027».</a:t>
             </a:r>
           </a:p>
         </p:txBody>
@@ -11954,7 +12837,1630 @@
                 </a:solidFill>
                 <a:latin typeface="IBM Plex Sans"/>
               </a:rPr>
-              <a:t>12 · Wettbewerb</a:t>
+              <a:t>12 · Events</a:t>
+            </a:r>
+          </a:p>
+        </p:txBody>
+      </p:sp>
+      <p:sp>
+        <p:nvSpPr>
+          <p:cNvPr id="3" name="TextBox 2"/>
+          <p:cNvSpPr txBox="1"/>
+          <p:nvPr/>
+        </p:nvSpPr>
+        <p:spPr>
+          <a:xfrm>
+            <a:off x="1591056" y="658368"/>
+            <a:ext cx="8183879" cy="914400"/>
+          </a:xfrm>
+          <a:prstGeom prst="rect">
+            <a:avLst/>
+          </a:prstGeom>
+          <a:noFill/>
+        </p:spPr>
+        <p:txBody>
+          <a:bodyPr wrap="square" lIns="0" rIns="0" tIns="0" bIns="0" anchor="t">
+            <a:spAutoFit/>
+          </a:bodyPr>
+          <a:lstStyle/>
+          <a:p>
+            <a:pPr algn="l">
+              <a:lnSpc>
+                <a:spcPct val="94000"/>
+              </a:lnSpc>
+            </a:pPr>
+            <a:r>
+              <a:rPr sz="2600" b="0">
+                <a:solidFill>
+                  <a:srgbClr val="000000"/>
+                </a:solidFill>
+                <a:latin typeface="Alata"/>
+              </a:rPr>
+              <a:t>Einzeln zu klein, als Saisonpaket stark</a:t>
+            </a:r>
+          </a:p>
+        </p:txBody>
+      </p:sp>
+      <p:sp>
+        <p:nvSpPr>
+          <p:cNvPr id="4" name="Rectangle 3"/>
+          <p:cNvSpPr/>
+          <p:nvPr/>
+        </p:nvSpPr>
+        <p:spPr>
+          <a:xfrm>
+            <a:off x="1591056" y="1572768"/>
+            <a:ext cx="1005840" cy="41148"/>
+          </a:xfrm>
+          <a:prstGeom prst="rect">
+            <a:avLst/>
+          </a:prstGeom>
+          <a:solidFill>
+            <a:srgbClr val="E00036"/>
+          </a:solidFill>
+          <a:ln>
+            <a:noFill/>
+          </a:ln>
+          <a:effectLst/>
+        </p:spPr>
+        <p:style>
+          <a:lnRef idx="1">
+            <a:schemeClr val="accent1"/>
+          </a:lnRef>
+          <a:fillRef idx="3">
+            <a:schemeClr val="accent1"/>
+          </a:fillRef>
+          <a:effectRef idx="2">
+            <a:schemeClr val="accent1"/>
+          </a:effectRef>
+          <a:fontRef idx="minor">
+            <a:schemeClr val="lt1"/>
+          </a:fontRef>
+        </p:style>
+        <p:txBody>
+          <a:bodyPr rtlCol="0" anchor="ctr" wrap="square"/>
+          <a:lstStyle/>
+          <a:p>
+            <a:pPr algn="ctr"/>
+          </a:p>
+        </p:txBody>
+      </p:sp>
+      <p:sp>
+        <p:nvSpPr>
+          <p:cNvPr id="5" name="TextBox 4"/>
+          <p:cNvSpPr txBox="1"/>
+          <p:nvPr/>
+        </p:nvSpPr>
+        <p:spPr>
+          <a:xfrm>
+            <a:off x="1591056" y="6355080"/>
+            <a:ext cx="7863840" cy="256032"/>
+          </a:xfrm>
+          <a:prstGeom prst="rect">
+            <a:avLst/>
+          </a:prstGeom>
+          <a:noFill/>
+        </p:spPr>
+        <p:txBody>
+          <a:bodyPr wrap="square" lIns="0" rIns="0" tIns="0" bIns="0" anchor="t">
+            <a:spAutoFit/>
+          </a:bodyPr>
+          <a:lstStyle/>
+          <a:p>
+            <a:pPr algn="l"/>
+            <a:r>
+              <a:rPr sz="850" b="0">
+                <a:solidFill>
+                  <a:srgbClr val="58595B"/>
+                </a:solidFill>
+                <a:latin typeface="IBM Plex Sans"/>
+              </a:rPr>
+              <a:t>MiT Strom CH · Top-Player Power 2027 · intern · 27.09.2026</a:t>
+            </a:r>
+          </a:p>
+        </p:txBody>
+      </p:sp>
+      <p:sp>
+        <p:nvSpPr>
+          <p:cNvPr id="6" name="TextBox 5"/>
+          <p:cNvSpPr txBox="1"/>
+          <p:nvPr/>
+        </p:nvSpPr>
+        <p:spPr>
+          <a:xfrm>
+            <a:off x="10149840" y="6355080"/>
+            <a:ext cx="914400" cy="256032"/>
+          </a:xfrm>
+          <a:prstGeom prst="rect">
+            <a:avLst/>
+          </a:prstGeom>
+          <a:noFill/>
+        </p:spPr>
+        <p:txBody>
+          <a:bodyPr wrap="square" lIns="0" rIns="0" tIns="0" bIns="0" anchor="t">
+            <a:spAutoFit/>
+          </a:bodyPr>
+          <a:lstStyle/>
+          <a:p>
+            <a:pPr algn="r"/>
+            <a:r>
+              <a:rPr sz="850" b="0">
+                <a:solidFill>
+                  <a:srgbClr val="58595B"/>
+                </a:solidFill>
+                <a:latin typeface="IBM Plex Sans"/>
+              </a:rPr>
+              <a:t>13</a:t>
+            </a:r>
+          </a:p>
+        </p:txBody>
+      </p:sp>
+      <p:pic>
+        <p:nvPicPr>
+          <p:cNvPr id="7" name="Picture 6" descr="event.png"/>
+          <p:cNvPicPr>
+            <a:picLocks noChangeAspect="1"/>
+          </p:cNvPicPr>
+          <p:nvPr/>
+        </p:nvPicPr>
+        <p:blipFill>
+          <a:blip r:embed="rId2"/>
+          <a:srcRect l="17692" r="32857"/>
+          <a:stretch>
+            <a:fillRect/>
+          </a:stretch>
+        </p:blipFill>
+        <p:spPr>
+          <a:xfrm>
+            <a:off x="429768" y="1874519"/>
+            <a:ext cx="3291840" cy="4160520"/>
+          </a:xfrm>
+          <a:prstGeom prst="rect">
+            <a:avLst/>
+          </a:prstGeom>
+          <a:ln>
+            <a:noFill/>
+          </a:ln>
+        </p:spPr>
+      </p:pic>
+      <p:sp>
+        <p:nvSpPr>
+          <p:cNvPr id="8" name="Rectangle 7"/>
+          <p:cNvSpPr/>
+          <p:nvPr/>
+        </p:nvSpPr>
+        <p:spPr>
+          <a:xfrm>
+            <a:off x="3931920" y="1874519"/>
+            <a:ext cx="7406640" cy="630936"/>
+          </a:xfrm>
+          <a:prstGeom prst="rect">
+            <a:avLst/>
+          </a:prstGeom>
+          <a:solidFill>
+            <a:srgbClr val="58595B"/>
+          </a:solidFill>
+          <a:ln>
+            <a:noFill/>
+          </a:ln>
+          <a:effectLst/>
+        </p:spPr>
+        <p:style>
+          <a:lnRef idx="1">
+            <a:schemeClr val="accent1"/>
+          </a:lnRef>
+          <a:fillRef idx="3">
+            <a:schemeClr val="accent1"/>
+          </a:fillRef>
+          <a:effectRef idx="2">
+            <a:schemeClr val="accent1"/>
+          </a:effectRef>
+          <a:fontRef idx="minor">
+            <a:schemeClr val="lt1"/>
+          </a:fontRef>
+        </p:style>
+        <p:txBody>
+          <a:bodyPr rtlCol="0" anchor="ctr" wrap="square"/>
+          <a:lstStyle/>
+          <a:p>
+            <a:pPr algn="ctr"/>
+          </a:p>
+        </p:txBody>
+      </p:sp>
+      <p:sp>
+        <p:nvSpPr>
+          <p:cNvPr id="9" name="TextBox 8"/>
+          <p:cNvSpPr txBox="1"/>
+          <p:nvPr/>
+        </p:nvSpPr>
+        <p:spPr>
+          <a:xfrm>
+            <a:off x="4114800" y="1938527"/>
+            <a:ext cx="5120640" cy="274320"/>
+          </a:xfrm>
+          <a:prstGeom prst="rect">
+            <a:avLst/>
+          </a:prstGeom>
+          <a:noFill/>
+        </p:spPr>
+        <p:txBody>
+          <a:bodyPr wrap="square" lIns="0" rIns="0" tIns="0" bIns="0" anchor="t">
+            <a:spAutoFit/>
+          </a:bodyPr>
+          <a:lstStyle/>
+          <a:p>
+            <a:pPr algn="l">
+              <a:lnSpc>
+                <a:spcPct val="105000"/>
+              </a:lnSpc>
+              <a:spcBef>
+                <a:spcPts val="0"/>
+              </a:spcBef>
+              <a:spcAft>
+                <a:spcPts val="0"/>
+              </a:spcAft>
+            </a:pPr>
+            <a:r>
+              <a:rPr sz="1250" b="1">
+                <a:solidFill>
+                  <a:srgbClr val="FFFFFF"/>
+                </a:solidFill>
+                <a:latin typeface="IBM Plex Sans"/>
+              </a:rPr>
+              <a:t>Paket Sommer-Festivals 2027</a:t>
+            </a:r>
+          </a:p>
+        </p:txBody>
+      </p:sp>
+      <p:sp>
+        <p:nvSpPr>
+          <p:cNvPr id="10" name="TextBox 9"/>
+          <p:cNvSpPr txBox="1"/>
+          <p:nvPr/>
+        </p:nvSpPr>
+        <p:spPr>
+          <a:xfrm>
+            <a:off x="4114800" y="2212848"/>
+            <a:ext cx="5303520" cy="274320"/>
+          </a:xfrm>
+          <a:prstGeom prst="rect">
+            <a:avLst/>
+          </a:prstGeom>
+          <a:noFill/>
+        </p:spPr>
+        <p:txBody>
+          <a:bodyPr wrap="square" lIns="0" rIns="0" tIns="0" bIns="0" anchor="t">
+            <a:spAutoFit/>
+          </a:bodyPr>
+          <a:lstStyle/>
+          <a:p>
+            <a:pPr algn="l">
+              <a:lnSpc>
+                <a:spcPct val="105000"/>
+              </a:lnSpc>
+              <a:spcBef>
+                <a:spcPts val="0"/>
+              </a:spcBef>
+              <a:spcAft>
+                <a:spcPts val="0"/>
+              </a:spcAft>
+            </a:pPr>
+            <a:r>
+              <a:rPr sz="950" b="0">
+                <a:solidFill>
+                  <a:srgbClr val="E6E6E6"/>
+                </a:solidFill>
+                <a:latin typeface="IBM Plex Sans"/>
+              </a:rPr>
+              <a:t>15 Anlässe, u.a. Greenfield Festival, Open Air Gampel, Heitere Open Air</a:t>
+            </a:r>
+          </a:p>
+        </p:txBody>
+      </p:sp>
+      <p:sp>
+        <p:nvSpPr>
+          <p:cNvPr id="11" name="TextBox 10"/>
+          <p:cNvSpPr txBox="1"/>
+          <p:nvPr/>
+        </p:nvSpPr>
+        <p:spPr>
+          <a:xfrm>
+            <a:off x="9326880" y="1938527"/>
+            <a:ext cx="1828800" cy="274320"/>
+          </a:xfrm>
+          <a:prstGeom prst="rect">
+            <a:avLst/>
+          </a:prstGeom>
+          <a:noFill/>
+        </p:spPr>
+        <p:txBody>
+          <a:bodyPr wrap="square" lIns="0" rIns="0" tIns="0" bIns="0" anchor="t">
+            <a:spAutoFit/>
+          </a:bodyPr>
+          <a:lstStyle/>
+          <a:p>
+            <a:pPr algn="r">
+              <a:lnSpc>
+                <a:spcPct val="105000"/>
+              </a:lnSpc>
+              <a:spcBef>
+                <a:spcPts val="0"/>
+              </a:spcBef>
+              <a:spcAft>
+                <a:spcPts val="0"/>
+              </a:spcAft>
+            </a:pPr>
+            <a:r>
+              <a:rPr sz="1300" b="1">
+                <a:solidFill>
+                  <a:srgbClr val="FFFFFF"/>
+                </a:solidFill>
+                <a:latin typeface="Alata"/>
+              </a:rPr>
+              <a:t>CHF 105'000</a:t>
+            </a:r>
+          </a:p>
+        </p:txBody>
+      </p:sp>
+      <p:sp>
+        <p:nvSpPr>
+          <p:cNvPr id="12" name="TextBox 11"/>
+          <p:cNvSpPr txBox="1"/>
+          <p:nvPr/>
+        </p:nvSpPr>
+        <p:spPr>
+          <a:xfrm>
+            <a:off x="9326880" y="2221991"/>
+            <a:ext cx="1828800" cy="274320"/>
+          </a:xfrm>
+          <a:prstGeom prst="rect">
+            <a:avLst/>
+          </a:prstGeom>
+          <a:noFill/>
+        </p:spPr>
+        <p:txBody>
+          <a:bodyPr wrap="square" lIns="0" rIns="0" tIns="0" bIns="0" anchor="t">
+            <a:spAutoFit/>
+          </a:bodyPr>
+          <a:lstStyle/>
+          <a:p>
+            <a:pPr algn="r">
+              <a:lnSpc>
+                <a:spcPct val="105000"/>
+              </a:lnSpc>
+              <a:spcBef>
+                <a:spcPts val="0"/>
+              </a:spcBef>
+              <a:spcAft>
+                <a:spcPts val="0"/>
+              </a:spcAft>
+            </a:pPr>
+            <a:r>
+              <a:rPr sz="950" b="0">
+                <a:solidFill>
+                  <a:srgbClr val="E6E6E6"/>
+                </a:solidFill>
+                <a:latin typeface="IBM Plex Sans"/>
+              </a:rPr>
+              <a:t>Erw. CHF 15'800</a:t>
+            </a:r>
+          </a:p>
+        </p:txBody>
+      </p:sp>
+      <p:sp>
+        <p:nvSpPr>
+          <p:cNvPr id="13" name="Rectangle 12"/>
+          <p:cNvSpPr/>
+          <p:nvPr/>
+        </p:nvSpPr>
+        <p:spPr>
+          <a:xfrm>
+            <a:off x="3931920" y="2578608"/>
+            <a:ext cx="7406640" cy="630936"/>
+          </a:xfrm>
+          <a:prstGeom prst="rect">
+            <a:avLst/>
+          </a:prstGeom>
+          <a:solidFill>
+            <a:srgbClr val="58595B"/>
+          </a:solidFill>
+          <a:ln>
+            <a:noFill/>
+          </a:ln>
+          <a:effectLst/>
+        </p:spPr>
+        <p:style>
+          <a:lnRef idx="1">
+            <a:schemeClr val="accent1"/>
+          </a:lnRef>
+          <a:fillRef idx="3">
+            <a:schemeClr val="accent1"/>
+          </a:fillRef>
+          <a:effectRef idx="2">
+            <a:schemeClr val="accent1"/>
+          </a:effectRef>
+          <a:fontRef idx="minor">
+            <a:schemeClr val="lt1"/>
+          </a:fontRef>
+        </p:style>
+        <p:txBody>
+          <a:bodyPr rtlCol="0" anchor="ctr" wrap="square"/>
+          <a:lstStyle/>
+          <a:p>
+            <a:pPr algn="ctr"/>
+          </a:p>
+        </p:txBody>
+      </p:sp>
+      <p:sp>
+        <p:nvSpPr>
+          <p:cNvPr id="14" name="TextBox 13"/>
+          <p:cNvSpPr txBox="1"/>
+          <p:nvPr/>
+        </p:nvSpPr>
+        <p:spPr>
+          <a:xfrm>
+            <a:off x="4114800" y="2642615"/>
+            <a:ext cx="5120640" cy="274320"/>
+          </a:xfrm>
+          <a:prstGeom prst="rect">
+            <a:avLst/>
+          </a:prstGeom>
+          <a:noFill/>
+        </p:spPr>
+        <p:txBody>
+          <a:bodyPr wrap="square" lIns="0" rIns="0" tIns="0" bIns="0" anchor="t">
+            <a:spAutoFit/>
+          </a:bodyPr>
+          <a:lstStyle/>
+          <a:p>
+            <a:pPr algn="l">
+              <a:lnSpc>
+                <a:spcPct val="105000"/>
+              </a:lnSpc>
+              <a:spcBef>
+                <a:spcPts val="0"/>
+              </a:spcBef>
+              <a:spcAft>
+                <a:spcPts val="0"/>
+              </a:spcAft>
+            </a:pPr>
+            <a:r>
+              <a:rPr sz="1250" b="1">
+                <a:solidFill>
+                  <a:srgbClr val="FFFFFF"/>
+                </a:solidFill>
+                <a:latin typeface="IBM Plex Sans"/>
+              </a:rPr>
+              <a:t>Paket Märkte, Messen, Fasnacht, Zirkus</a:t>
+            </a:r>
+          </a:p>
+        </p:txBody>
+      </p:sp>
+      <p:sp>
+        <p:nvSpPr>
+          <p:cNvPr id="15" name="TextBox 14"/>
+          <p:cNvSpPr txBox="1"/>
+          <p:nvPr/>
+        </p:nvSpPr>
+        <p:spPr>
+          <a:xfrm>
+            <a:off x="4114800" y="2916936"/>
+            <a:ext cx="5303520" cy="274320"/>
+          </a:xfrm>
+          <a:prstGeom prst="rect">
+            <a:avLst/>
+          </a:prstGeom>
+          <a:noFill/>
+        </p:spPr>
+        <p:txBody>
+          <a:bodyPr wrap="square" lIns="0" rIns="0" tIns="0" bIns="0" anchor="t">
+            <a:spAutoFit/>
+          </a:bodyPr>
+          <a:lstStyle/>
+          <a:p>
+            <a:pPr algn="l">
+              <a:lnSpc>
+                <a:spcPct val="105000"/>
+              </a:lnSpc>
+              <a:spcBef>
+                <a:spcPts val="0"/>
+              </a:spcBef>
+              <a:spcAft>
+                <a:spcPts val="0"/>
+              </a:spcAft>
+            </a:pPr>
+            <a:r>
+              <a:rPr sz="950" b="0">
+                <a:solidFill>
+                  <a:srgbClr val="E6E6E6"/>
+                </a:solidFill>
+                <a:latin typeface="IBM Plex Sans"/>
+              </a:rPr>
+              <a:t>13 Anlässe, u.a. Circus Knie Tournee, BEA, LUGA</a:t>
+            </a:r>
+          </a:p>
+        </p:txBody>
+      </p:sp>
+      <p:sp>
+        <p:nvSpPr>
+          <p:cNvPr id="16" name="TextBox 15"/>
+          <p:cNvSpPr txBox="1"/>
+          <p:nvPr/>
+        </p:nvSpPr>
+        <p:spPr>
+          <a:xfrm>
+            <a:off x="9326880" y="2642615"/>
+            <a:ext cx="1828800" cy="274320"/>
+          </a:xfrm>
+          <a:prstGeom prst="rect">
+            <a:avLst/>
+          </a:prstGeom>
+          <a:noFill/>
+        </p:spPr>
+        <p:txBody>
+          <a:bodyPr wrap="square" lIns="0" rIns="0" tIns="0" bIns="0" anchor="t">
+            <a:spAutoFit/>
+          </a:bodyPr>
+          <a:lstStyle/>
+          <a:p>
+            <a:pPr algn="r">
+              <a:lnSpc>
+                <a:spcPct val="105000"/>
+              </a:lnSpc>
+              <a:spcBef>
+                <a:spcPts val="0"/>
+              </a:spcBef>
+              <a:spcAft>
+                <a:spcPts val="0"/>
+              </a:spcAft>
+            </a:pPr>
+            <a:r>
+              <a:rPr sz="1300" b="1">
+                <a:solidFill>
+                  <a:srgbClr val="FFFFFF"/>
+                </a:solidFill>
+                <a:latin typeface="Alata"/>
+              </a:rPr>
+              <a:t>CHF 92'800</a:t>
+            </a:r>
+          </a:p>
+        </p:txBody>
+      </p:sp>
+      <p:sp>
+        <p:nvSpPr>
+          <p:cNvPr id="17" name="TextBox 16"/>
+          <p:cNvSpPr txBox="1"/>
+          <p:nvPr/>
+        </p:nvSpPr>
+        <p:spPr>
+          <a:xfrm>
+            <a:off x="9326880" y="2926079"/>
+            <a:ext cx="1828800" cy="274320"/>
+          </a:xfrm>
+          <a:prstGeom prst="rect">
+            <a:avLst/>
+          </a:prstGeom>
+          <a:noFill/>
+        </p:spPr>
+        <p:txBody>
+          <a:bodyPr wrap="square" lIns="0" rIns="0" tIns="0" bIns="0" anchor="t">
+            <a:spAutoFit/>
+          </a:bodyPr>
+          <a:lstStyle/>
+          <a:p>
+            <a:pPr algn="r">
+              <a:lnSpc>
+                <a:spcPct val="105000"/>
+              </a:lnSpc>
+              <a:spcBef>
+                <a:spcPts val="0"/>
+              </a:spcBef>
+              <a:spcAft>
+                <a:spcPts val="0"/>
+              </a:spcAft>
+            </a:pPr>
+            <a:r>
+              <a:rPr sz="950" b="0">
+                <a:solidFill>
+                  <a:srgbClr val="E6E6E6"/>
+                </a:solidFill>
+                <a:latin typeface="IBM Plex Sans"/>
+              </a:rPr>
+              <a:t>Erw. CHF 9'800</a:t>
+            </a:r>
+          </a:p>
+        </p:txBody>
+      </p:sp>
+      <p:sp>
+        <p:nvSpPr>
+          <p:cNvPr id="18" name="Rectangle 17"/>
+          <p:cNvSpPr/>
+          <p:nvPr/>
+        </p:nvSpPr>
+        <p:spPr>
+          <a:xfrm>
+            <a:off x="3931920" y="3282696"/>
+            <a:ext cx="7406640" cy="630936"/>
+          </a:xfrm>
+          <a:prstGeom prst="rect">
+            <a:avLst/>
+          </a:prstGeom>
+          <a:solidFill>
+            <a:srgbClr val="58595B"/>
+          </a:solidFill>
+          <a:ln>
+            <a:noFill/>
+          </a:ln>
+          <a:effectLst/>
+        </p:spPr>
+        <p:style>
+          <a:lnRef idx="1">
+            <a:schemeClr val="accent1"/>
+          </a:lnRef>
+          <a:fillRef idx="3">
+            <a:schemeClr val="accent1"/>
+          </a:fillRef>
+          <a:effectRef idx="2">
+            <a:schemeClr val="accent1"/>
+          </a:effectRef>
+          <a:fontRef idx="minor">
+            <a:schemeClr val="lt1"/>
+          </a:fontRef>
+        </p:style>
+        <p:txBody>
+          <a:bodyPr rtlCol="0" anchor="ctr" wrap="square"/>
+          <a:lstStyle/>
+          <a:p>
+            <a:pPr algn="ctr"/>
+          </a:p>
+        </p:txBody>
+      </p:sp>
+      <p:sp>
+        <p:nvSpPr>
+          <p:cNvPr id="19" name="TextBox 18"/>
+          <p:cNvSpPr txBox="1"/>
+          <p:nvPr/>
+        </p:nvSpPr>
+        <p:spPr>
+          <a:xfrm>
+            <a:off x="4114800" y="3346703"/>
+            <a:ext cx="5120640" cy="274320"/>
+          </a:xfrm>
+          <a:prstGeom prst="rect">
+            <a:avLst/>
+          </a:prstGeom>
+          <a:noFill/>
+        </p:spPr>
+        <p:txBody>
+          <a:bodyPr wrap="square" lIns="0" rIns="0" tIns="0" bIns="0" anchor="t">
+            <a:spAutoFit/>
+          </a:bodyPr>
+          <a:lstStyle/>
+          <a:p>
+            <a:pPr algn="l">
+              <a:lnSpc>
+                <a:spcPct val="105000"/>
+              </a:lnSpc>
+              <a:spcBef>
+                <a:spcPts val="0"/>
+              </a:spcBef>
+              <a:spcAft>
+                <a:spcPts val="0"/>
+              </a:spcAft>
+            </a:pPr>
+            <a:r>
+              <a:rPr sz="1250" b="1">
+                <a:solidFill>
+                  <a:srgbClr val="FFFFFF"/>
+                </a:solidFill>
+                <a:latin typeface="IBM Plex Sans"/>
+              </a:rPr>
+              <a:t>ESAF 2028 Thun</a:t>
+            </a:r>
+          </a:p>
+        </p:txBody>
+      </p:sp>
+      <p:sp>
+        <p:nvSpPr>
+          <p:cNvPr id="20" name="TextBox 19"/>
+          <p:cNvSpPr txBox="1"/>
+          <p:nvPr/>
+        </p:nvSpPr>
+        <p:spPr>
+          <a:xfrm>
+            <a:off x="4114800" y="3621024"/>
+            <a:ext cx="5303520" cy="274320"/>
+          </a:xfrm>
+          <a:prstGeom prst="rect">
+            <a:avLst/>
+          </a:prstGeom>
+          <a:noFill/>
+        </p:spPr>
+        <p:txBody>
+          <a:bodyPr wrap="square" lIns="0" rIns="0" tIns="0" bIns="0" anchor="t">
+            <a:spAutoFit/>
+          </a:bodyPr>
+          <a:lstStyle/>
+          <a:p>
+            <a:pPr algn="l">
+              <a:lnSpc>
+                <a:spcPct val="105000"/>
+              </a:lnSpc>
+              <a:spcBef>
+                <a:spcPts val="0"/>
+              </a:spcBef>
+              <a:spcAft>
+                <a:spcPts val="0"/>
+              </a:spcAft>
+            </a:pPr>
+            <a:r>
+              <a:rPr sz="950" b="0">
+                <a:solidFill>
+                  <a:srgbClr val="E6E6E6"/>
+                </a:solidFill>
+                <a:latin typeface="IBM Plex Sans"/>
+              </a:rPr>
+              <a:t>25. bis 27.08.2028, Thuner Allmend · Arena, Festgelände, Camping</a:t>
+            </a:r>
+          </a:p>
+        </p:txBody>
+      </p:sp>
+      <p:sp>
+        <p:nvSpPr>
+          <p:cNvPr id="21" name="TextBox 20"/>
+          <p:cNvSpPr txBox="1"/>
+          <p:nvPr/>
+        </p:nvSpPr>
+        <p:spPr>
+          <a:xfrm>
+            <a:off x="9326880" y="3346703"/>
+            <a:ext cx="1828800" cy="274320"/>
+          </a:xfrm>
+          <a:prstGeom prst="rect">
+            <a:avLst/>
+          </a:prstGeom>
+          <a:noFill/>
+        </p:spPr>
+        <p:txBody>
+          <a:bodyPr wrap="square" lIns="0" rIns="0" tIns="0" bIns="0" anchor="t">
+            <a:spAutoFit/>
+          </a:bodyPr>
+          <a:lstStyle/>
+          <a:p>
+            <a:pPr algn="r">
+              <a:lnSpc>
+                <a:spcPct val="105000"/>
+              </a:lnSpc>
+              <a:spcBef>
+                <a:spcPts val="0"/>
+              </a:spcBef>
+              <a:spcAft>
+                <a:spcPts val="0"/>
+              </a:spcAft>
+            </a:pPr>
+            <a:r>
+              <a:rPr sz="1300" b="1">
+                <a:solidFill>
+                  <a:srgbClr val="FFFFFF"/>
+                </a:solidFill>
+                <a:latin typeface="Alata"/>
+              </a:rPr>
+              <a:t>CHF 92'700</a:t>
+            </a:r>
+          </a:p>
+        </p:txBody>
+      </p:sp>
+      <p:sp>
+        <p:nvSpPr>
+          <p:cNvPr id="22" name="TextBox 21"/>
+          <p:cNvSpPr txBox="1"/>
+          <p:nvPr/>
+        </p:nvSpPr>
+        <p:spPr>
+          <a:xfrm>
+            <a:off x="9326880" y="3630168"/>
+            <a:ext cx="1828800" cy="274320"/>
+          </a:xfrm>
+          <a:prstGeom prst="rect">
+            <a:avLst/>
+          </a:prstGeom>
+          <a:noFill/>
+        </p:spPr>
+        <p:txBody>
+          <a:bodyPr wrap="square" lIns="0" rIns="0" tIns="0" bIns="0" anchor="t">
+            <a:spAutoFit/>
+          </a:bodyPr>
+          <a:lstStyle/>
+          <a:p>
+            <a:pPr algn="r">
+              <a:lnSpc>
+                <a:spcPct val="105000"/>
+              </a:lnSpc>
+              <a:spcBef>
+                <a:spcPts val="0"/>
+              </a:spcBef>
+              <a:spcAft>
+                <a:spcPts val="0"/>
+              </a:spcAft>
+            </a:pPr>
+            <a:r>
+              <a:rPr sz="950" b="0">
+                <a:solidFill>
+                  <a:srgbClr val="E6E6E6"/>
+                </a:solidFill>
+                <a:latin typeface="IBM Plex Sans"/>
+              </a:rPr>
+              <a:t>Erw. CHF 0</a:t>
+            </a:r>
+          </a:p>
+        </p:txBody>
+      </p:sp>
+      <p:sp>
+        <p:nvSpPr>
+          <p:cNvPr id="23" name="Rectangle 22"/>
+          <p:cNvSpPr/>
+          <p:nvPr/>
+        </p:nvSpPr>
+        <p:spPr>
+          <a:xfrm>
+            <a:off x="3931920" y="3986783"/>
+            <a:ext cx="7406640" cy="630936"/>
+          </a:xfrm>
+          <a:prstGeom prst="rect">
+            <a:avLst/>
+          </a:prstGeom>
+          <a:solidFill>
+            <a:srgbClr val="58595B"/>
+          </a:solidFill>
+          <a:ln>
+            <a:noFill/>
+          </a:ln>
+          <a:effectLst/>
+        </p:spPr>
+        <p:style>
+          <a:lnRef idx="1">
+            <a:schemeClr val="accent1"/>
+          </a:lnRef>
+          <a:fillRef idx="3">
+            <a:schemeClr val="accent1"/>
+          </a:fillRef>
+          <a:effectRef idx="2">
+            <a:schemeClr val="accent1"/>
+          </a:effectRef>
+          <a:fontRef idx="minor">
+            <a:schemeClr val="lt1"/>
+          </a:fontRef>
+        </p:style>
+        <p:txBody>
+          <a:bodyPr rtlCol="0" anchor="ctr" wrap="square"/>
+          <a:lstStyle/>
+          <a:p>
+            <a:pPr algn="ctr"/>
+          </a:p>
+        </p:txBody>
+      </p:sp>
+      <p:sp>
+        <p:nvSpPr>
+          <p:cNvPr id="24" name="TextBox 23"/>
+          <p:cNvSpPr txBox="1"/>
+          <p:nvPr/>
+        </p:nvSpPr>
+        <p:spPr>
+          <a:xfrm>
+            <a:off x="4114800" y="4050791"/>
+            <a:ext cx="5120640" cy="274320"/>
+          </a:xfrm>
+          <a:prstGeom prst="rect">
+            <a:avLst/>
+          </a:prstGeom>
+          <a:noFill/>
+        </p:spPr>
+        <p:txBody>
+          <a:bodyPr wrap="square" lIns="0" rIns="0" tIns="0" bIns="0" anchor="t">
+            <a:spAutoFit/>
+          </a:bodyPr>
+          <a:lstStyle/>
+          <a:p>
+            <a:pPr algn="l">
+              <a:lnSpc>
+                <a:spcPct val="105000"/>
+              </a:lnSpc>
+              <a:spcBef>
+                <a:spcPts val="0"/>
+              </a:spcBef>
+              <a:spcAft>
+                <a:spcPts val="0"/>
+              </a:spcAft>
+            </a:pPr>
+            <a:r>
+              <a:rPr sz="1250" b="1">
+                <a:solidFill>
+                  <a:srgbClr val="FFFFFF"/>
+                </a:solidFill>
+                <a:latin typeface="IBM Plex Sans"/>
+              </a:rPr>
+              <a:t>WEF 2027</a:t>
+            </a:r>
+          </a:p>
+        </p:txBody>
+      </p:sp>
+      <p:sp>
+        <p:nvSpPr>
+          <p:cNvPr id="25" name="TextBox 24"/>
+          <p:cNvSpPr txBox="1"/>
+          <p:nvPr/>
+        </p:nvSpPr>
+        <p:spPr>
+          <a:xfrm>
+            <a:off x="4114800" y="4325112"/>
+            <a:ext cx="5303520" cy="274320"/>
+          </a:xfrm>
+          <a:prstGeom prst="rect">
+            <a:avLst/>
+          </a:prstGeom>
+          <a:noFill/>
+        </p:spPr>
+        <p:txBody>
+          <a:bodyPr wrap="square" lIns="0" rIns="0" tIns="0" bIns="0" anchor="t">
+            <a:spAutoFit/>
+          </a:bodyPr>
+          <a:lstStyle/>
+          <a:p>
+            <a:pPr algn="l">
+              <a:lnSpc>
+                <a:spcPct val="105000"/>
+              </a:lnSpc>
+              <a:spcBef>
+                <a:spcPts val="0"/>
+              </a:spcBef>
+              <a:spcAft>
+                <a:spcPts val="0"/>
+              </a:spcAft>
+            </a:pPr>
+            <a:r>
+              <a:rPr sz="950" b="0">
+                <a:solidFill>
+                  <a:srgbClr val="E6E6E6"/>
+                </a:solidFill>
+                <a:latin typeface="IBM Plex Sans"/>
+              </a:rPr>
+              <a:t>18. bis 22.01.2027, Davos · Pavillons und Sicherheit bei knappem Ortsnetz</a:t>
+            </a:r>
+          </a:p>
+        </p:txBody>
+      </p:sp>
+      <p:sp>
+        <p:nvSpPr>
+          <p:cNvPr id="26" name="TextBox 25"/>
+          <p:cNvSpPr txBox="1"/>
+          <p:nvPr/>
+        </p:nvSpPr>
+        <p:spPr>
+          <a:xfrm>
+            <a:off x="9326880" y="4050791"/>
+            <a:ext cx="1828800" cy="274320"/>
+          </a:xfrm>
+          <a:prstGeom prst="rect">
+            <a:avLst/>
+          </a:prstGeom>
+          <a:noFill/>
+        </p:spPr>
+        <p:txBody>
+          <a:bodyPr wrap="square" lIns="0" rIns="0" tIns="0" bIns="0" anchor="t">
+            <a:spAutoFit/>
+          </a:bodyPr>
+          <a:lstStyle/>
+          <a:p>
+            <a:pPr algn="r">
+              <a:lnSpc>
+                <a:spcPct val="105000"/>
+              </a:lnSpc>
+              <a:spcBef>
+                <a:spcPts val="0"/>
+              </a:spcBef>
+              <a:spcAft>
+                <a:spcPts val="0"/>
+              </a:spcAft>
+            </a:pPr>
+            <a:r>
+              <a:rPr sz="1300" b="1">
+                <a:solidFill>
+                  <a:srgbClr val="FFFFFF"/>
+                </a:solidFill>
+                <a:latin typeface="Alata"/>
+              </a:rPr>
+              <a:t>CHF 75'700</a:t>
+            </a:r>
+          </a:p>
+        </p:txBody>
+      </p:sp>
+      <p:sp>
+        <p:nvSpPr>
+          <p:cNvPr id="27" name="TextBox 26"/>
+          <p:cNvSpPr txBox="1"/>
+          <p:nvPr/>
+        </p:nvSpPr>
+        <p:spPr>
+          <a:xfrm>
+            <a:off x="9326880" y="4334255"/>
+            <a:ext cx="1828800" cy="274320"/>
+          </a:xfrm>
+          <a:prstGeom prst="rect">
+            <a:avLst/>
+          </a:prstGeom>
+          <a:noFill/>
+        </p:spPr>
+        <p:txBody>
+          <a:bodyPr wrap="square" lIns="0" rIns="0" tIns="0" bIns="0" anchor="t">
+            <a:spAutoFit/>
+          </a:bodyPr>
+          <a:lstStyle/>
+          <a:p>
+            <a:pPr algn="r">
+              <a:lnSpc>
+                <a:spcPct val="105000"/>
+              </a:lnSpc>
+              <a:spcBef>
+                <a:spcPts val="0"/>
+              </a:spcBef>
+              <a:spcAft>
+                <a:spcPts val="0"/>
+              </a:spcAft>
+            </a:pPr>
+            <a:r>
+              <a:rPr sz="950" b="0">
+                <a:solidFill>
+                  <a:srgbClr val="E6E6E6"/>
+                </a:solidFill>
+                <a:latin typeface="IBM Plex Sans"/>
+              </a:rPr>
+              <a:t>Erw. CHF 11'400</a:t>
+            </a:r>
+          </a:p>
+        </p:txBody>
+      </p:sp>
+      <p:sp>
+        <p:nvSpPr>
+          <p:cNvPr id="28" name="Rectangle 27"/>
+          <p:cNvSpPr/>
+          <p:nvPr/>
+        </p:nvSpPr>
+        <p:spPr>
+          <a:xfrm>
+            <a:off x="3931920" y="4690872"/>
+            <a:ext cx="7406640" cy="630936"/>
+          </a:xfrm>
+          <a:prstGeom prst="rect">
+            <a:avLst/>
+          </a:prstGeom>
+          <a:solidFill>
+            <a:srgbClr val="58595B"/>
+          </a:solidFill>
+          <a:ln>
+            <a:noFill/>
+          </a:ln>
+          <a:effectLst/>
+        </p:spPr>
+        <p:style>
+          <a:lnRef idx="1">
+            <a:schemeClr val="accent1"/>
+          </a:lnRef>
+          <a:fillRef idx="3">
+            <a:schemeClr val="accent1"/>
+          </a:fillRef>
+          <a:effectRef idx="2">
+            <a:schemeClr val="accent1"/>
+          </a:effectRef>
+          <a:fontRef idx="minor">
+            <a:schemeClr val="lt1"/>
+          </a:fontRef>
+        </p:style>
+        <p:txBody>
+          <a:bodyPr rtlCol="0" anchor="ctr" wrap="square"/>
+          <a:lstStyle/>
+          <a:p>
+            <a:pPr algn="ctr"/>
+          </a:p>
+        </p:txBody>
+      </p:sp>
+      <p:sp>
+        <p:nvSpPr>
+          <p:cNvPr id="29" name="TextBox 28"/>
+          <p:cNvSpPr txBox="1"/>
+          <p:nvPr/>
+        </p:nvSpPr>
+        <p:spPr>
+          <a:xfrm>
+            <a:off x="4114800" y="4754880"/>
+            <a:ext cx="5120640" cy="274320"/>
+          </a:xfrm>
+          <a:prstGeom prst="rect">
+            <a:avLst/>
+          </a:prstGeom>
+          <a:noFill/>
+        </p:spPr>
+        <p:txBody>
+          <a:bodyPr wrap="square" lIns="0" rIns="0" tIns="0" bIns="0" anchor="t">
+            <a:spAutoFit/>
+          </a:bodyPr>
+          <a:lstStyle/>
+          <a:p>
+            <a:pPr algn="l">
+              <a:lnSpc>
+                <a:spcPct val="105000"/>
+              </a:lnSpc>
+              <a:spcBef>
+                <a:spcPts val="0"/>
+              </a:spcBef>
+              <a:spcAft>
+                <a:spcPts val="0"/>
+              </a:spcAft>
+            </a:pPr>
+            <a:r>
+              <a:rPr sz="1250" b="1">
+                <a:solidFill>
+                  <a:srgbClr val="FFFFFF"/>
+                </a:solidFill>
+                <a:latin typeface="IBM Plex Sans"/>
+              </a:rPr>
+              <a:t>Paket Sport-Grossanlässe 2027</a:t>
+            </a:r>
+          </a:p>
+        </p:txBody>
+      </p:sp>
+      <p:sp>
+        <p:nvSpPr>
+          <p:cNvPr id="30" name="TextBox 29"/>
+          <p:cNvSpPr txBox="1"/>
+          <p:nvPr/>
+        </p:nvSpPr>
+        <p:spPr>
+          <a:xfrm>
+            <a:off x="4114800" y="5029200"/>
+            <a:ext cx="5303520" cy="274320"/>
+          </a:xfrm>
+          <a:prstGeom prst="rect">
+            <a:avLst/>
+          </a:prstGeom>
+          <a:noFill/>
+        </p:spPr>
+        <p:txBody>
+          <a:bodyPr wrap="square" lIns="0" rIns="0" tIns="0" bIns="0" anchor="t">
+            <a:spAutoFit/>
+          </a:bodyPr>
+          <a:lstStyle/>
+          <a:p>
+            <a:pPr algn="l">
+              <a:lnSpc>
+                <a:spcPct val="105000"/>
+              </a:lnSpc>
+              <a:spcBef>
+                <a:spcPts val="0"/>
+              </a:spcBef>
+              <a:spcAft>
+                <a:spcPts val="0"/>
+              </a:spcAft>
+            </a:pPr>
+            <a:r>
+              <a:rPr sz="950" b="0">
+                <a:solidFill>
+                  <a:srgbClr val="E6E6E6"/>
+                </a:solidFill>
+                <a:latin typeface="IBM Plex Sans"/>
+              </a:rPr>
+              <a:t>13 Anlässe, u.a. Ruder-WM Luzern, Beachvolleyball-EM, CSIO St.Gallen</a:t>
+            </a:r>
+          </a:p>
+        </p:txBody>
+      </p:sp>
+      <p:sp>
+        <p:nvSpPr>
+          <p:cNvPr id="31" name="TextBox 30"/>
+          <p:cNvSpPr txBox="1"/>
+          <p:nvPr/>
+        </p:nvSpPr>
+        <p:spPr>
+          <a:xfrm>
+            <a:off x="9326880" y="4754880"/>
+            <a:ext cx="1828800" cy="274320"/>
+          </a:xfrm>
+          <a:prstGeom prst="rect">
+            <a:avLst/>
+          </a:prstGeom>
+          <a:noFill/>
+        </p:spPr>
+        <p:txBody>
+          <a:bodyPr wrap="square" lIns="0" rIns="0" tIns="0" bIns="0" anchor="t">
+            <a:spAutoFit/>
+          </a:bodyPr>
+          <a:lstStyle/>
+          <a:p>
+            <a:pPr algn="r">
+              <a:lnSpc>
+                <a:spcPct val="105000"/>
+              </a:lnSpc>
+              <a:spcBef>
+                <a:spcPts val="0"/>
+              </a:spcBef>
+              <a:spcAft>
+                <a:spcPts val="0"/>
+              </a:spcAft>
+            </a:pPr>
+            <a:r>
+              <a:rPr sz="1300" b="1">
+                <a:solidFill>
+                  <a:srgbClr val="FFFFFF"/>
+                </a:solidFill>
+                <a:latin typeface="Alata"/>
+              </a:rPr>
+              <a:t>CHF 68'400</a:t>
+            </a:r>
+          </a:p>
+        </p:txBody>
+      </p:sp>
+      <p:sp>
+        <p:nvSpPr>
+          <p:cNvPr id="32" name="TextBox 31"/>
+          <p:cNvSpPr txBox="1"/>
+          <p:nvPr/>
+        </p:nvSpPr>
+        <p:spPr>
+          <a:xfrm>
+            <a:off x="9326880" y="5038344"/>
+            <a:ext cx="1828800" cy="274320"/>
+          </a:xfrm>
+          <a:prstGeom prst="rect">
+            <a:avLst/>
+          </a:prstGeom>
+          <a:noFill/>
+        </p:spPr>
+        <p:txBody>
+          <a:bodyPr wrap="square" lIns="0" rIns="0" tIns="0" bIns="0" anchor="t">
+            <a:spAutoFit/>
+          </a:bodyPr>
+          <a:lstStyle/>
+          <a:p>
+            <a:pPr algn="r">
+              <a:lnSpc>
+                <a:spcPct val="105000"/>
+              </a:lnSpc>
+              <a:spcBef>
+                <a:spcPts val="0"/>
+              </a:spcBef>
+              <a:spcAft>
+                <a:spcPts val="0"/>
+              </a:spcAft>
+            </a:pPr>
+            <a:r>
+              <a:rPr sz="950" b="0">
+                <a:solidFill>
+                  <a:srgbClr val="E6E6E6"/>
+                </a:solidFill>
+                <a:latin typeface="IBM Plex Sans"/>
+              </a:rPr>
+              <a:t>Erw. CHF 9'800</a:t>
+            </a:r>
+          </a:p>
+        </p:txBody>
+      </p:sp>
+      <p:sp>
+        <p:nvSpPr>
+          <p:cNvPr id="33" name="Rectangle 32"/>
+          <p:cNvSpPr/>
+          <p:nvPr/>
+        </p:nvSpPr>
+        <p:spPr>
+          <a:xfrm>
+            <a:off x="3931920" y="5394960"/>
+            <a:ext cx="7406640" cy="630936"/>
+          </a:xfrm>
+          <a:prstGeom prst="rect">
+            <a:avLst/>
+          </a:prstGeom>
+          <a:solidFill>
+            <a:srgbClr val="E00036"/>
+          </a:solidFill>
+          <a:ln>
+            <a:noFill/>
+          </a:ln>
+          <a:effectLst/>
+        </p:spPr>
+        <p:style>
+          <a:lnRef idx="1">
+            <a:schemeClr val="accent1"/>
+          </a:lnRef>
+          <a:fillRef idx="3">
+            <a:schemeClr val="accent1"/>
+          </a:fillRef>
+          <a:effectRef idx="2">
+            <a:schemeClr val="accent1"/>
+          </a:effectRef>
+          <a:fontRef idx="minor">
+            <a:schemeClr val="lt1"/>
+          </a:fontRef>
+        </p:style>
+        <p:txBody>
+          <a:bodyPr rtlCol="0" anchor="ctr" wrap="square"/>
+          <a:lstStyle/>
+          <a:p>
+            <a:pPr algn="ctr"/>
+          </a:p>
+        </p:txBody>
+      </p:sp>
+      <p:sp>
+        <p:nvSpPr>
+          <p:cNvPr id="34" name="TextBox 33"/>
+          <p:cNvSpPr txBox="1"/>
+          <p:nvPr/>
+        </p:nvSpPr>
+        <p:spPr>
+          <a:xfrm>
+            <a:off x="4114800" y="5458968"/>
+            <a:ext cx="5120640" cy="274320"/>
+          </a:xfrm>
+          <a:prstGeom prst="rect">
+            <a:avLst/>
+          </a:prstGeom>
+          <a:noFill/>
+        </p:spPr>
+        <p:txBody>
+          <a:bodyPr wrap="square" lIns="0" rIns="0" tIns="0" bIns="0" anchor="t">
+            <a:spAutoFit/>
+          </a:bodyPr>
+          <a:lstStyle/>
+          <a:p>
+            <a:pPr algn="l">
+              <a:lnSpc>
+                <a:spcPct val="105000"/>
+              </a:lnSpc>
+              <a:spcBef>
+                <a:spcPts val="0"/>
+              </a:spcBef>
+              <a:spcAft>
+                <a:spcPts val="0"/>
+              </a:spcAft>
+            </a:pPr>
+            <a:r>
+              <a:rPr sz="1250" b="1">
+                <a:solidFill>
+                  <a:srgbClr val="FFFFFF"/>
+                </a:solidFill>
+                <a:latin typeface="IBM Plex Sans"/>
+              </a:rPr>
+              <a:t>FIS Ski-WM Crans-Montana 2027</a:t>
+            </a:r>
+          </a:p>
+        </p:txBody>
+      </p:sp>
+      <p:sp>
+        <p:nvSpPr>
+          <p:cNvPr id="35" name="TextBox 34"/>
+          <p:cNvSpPr txBox="1"/>
+          <p:nvPr/>
+        </p:nvSpPr>
+        <p:spPr>
+          <a:xfrm>
+            <a:off x="4114800" y="5733288"/>
+            <a:ext cx="5303520" cy="274320"/>
+          </a:xfrm>
+          <a:prstGeom prst="rect">
+            <a:avLst/>
+          </a:prstGeom>
+          <a:noFill/>
+        </p:spPr>
+        <p:txBody>
+          <a:bodyPr wrap="square" lIns="0" rIns="0" tIns="0" bIns="0" anchor="t">
+            <a:spAutoFit/>
+          </a:bodyPr>
+          <a:lstStyle/>
+          <a:p>
+            <a:pPr algn="l">
+              <a:lnSpc>
+                <a:spcPct val="105000"/>
+              </a:lnSpc>
+              <a:spcBef>
+                <a:spcPts val="0"/>
+              </a:spcBef>
+              <a:spcAft>
+                <a:spcPts val="0"/>
+              </a:spcAft>
+            </a:pPr>
+            <a:r>
+              <a:rPr sz="950" b="0">
+                <a:solidFill>
+                  <a:srgbClr val="FFFFFF"/>
+                </a:solidFill>
+                <a:latin typeface="IBM Plex Sans"/>
+              </a:rPr>
+              <a:t>01. bis 14.02.2027 · Broadcast, Fan-Zonen, Hospitality</a:t>
+            </a:r>
+          </a:p>
+        </p:txBody>
+      </p:sp>
+      <p:sp>
+        <p:nvSpPr>
+          <p:cNvPr id="36" name="TextBox 35"/>
+          <p:cNvSpPr txBox="1"/>
+          <p:nvPr/>
+        </p:nvSpPr>
+        <p:spPr>
+          <a:xfrm>
+            <a:off x="9326880" y="5458968"/>
+            <a:ext cx="1828800" cy="274320"/>
+          </a:xfrm>
+          <a:prstGeom prst="rect">
+            <a:avLst/>
+          </a:prstGeom>
+          <a:noFill/>
+        </p:spPr>
+        <p:txBody>
+          <a:bodyPr wrap="square" lIns="0" rIns="0" tIns="0" bIns="0" anchor="t">
+            <a:spAutoFit/>
+          </a:bodyPr>
+          <a:lstStyle/>
+          <a:p>
+            <a:pPr algn="r">
+              <a:lnSpc>
+                <a:spcPct val="105000"/>
+              </a:lnSpc>
+              <a:spcBef>
+                <a:spcPts val="0"/>
+              </a:spcBef>
+              <a:spcAft>
+                <a:spcPts val="0"/>
+              </a:spcAft>
+            </a:pPr>
+            <a:r>
+              <a:rPr sz="1300" b="1">
+                <a:solidFill>
+                  <a:srgbClr val="FFFFFF"/>
+                </a:solidFill>
+                <a:latin typeface="Alata"/>
+              </a:rPr>
+              <a:t>CHF 63'300</a:t>
+            </a:r>
+          </a:p>
+        </p:txBody>
+      </p:sp>
+      <p:sp>
+        <p:nvSpPr>
+          <p:cNvPr id="37" name="TextBox 36"/>
+          <p:cNvSpPr txBox="1"/>
+          <p:nvPr/>
+        </p:nvSpPr>
+        <p:spPr>
+          <a:xfrm>
+            <a:off x="9326880" y="5742432"/>
+            <a:ext cx="1828800" cy="274320"/>
+          </a:xfrm>
+          <a:prstGeom prst="rect">
+            <a:avLst/>
+          </a:prstGeom>
+          <a:noFill/>
+        </p:spPr>
+        <p:txBody>
+          <a:bodyPr wrap="square" lIns="0" rIns="0" tIns="0" bIns="0" anchor="t">
+            <a:spAutoFit/>
+          </a:bodyPr>
+          <a:lstStyle/>
+          <a:p>
+            <a:pPr algn="r">
+              <a:lnSpc>
+                <a:spcPct val="105000"/>
+              </a:lnSpc>
+              <a:spcBef>
+                <a:spcPts val="0"/>
+              </a:spcBef>
+              <a:spcAft>
+                <a:spcPts val="0"/>
+              </a:spcAft>
+            </a:pPr>
+            <a:r>
+              <a:rPr sz="950" b="0">
+                <a:solidFill>
+                  <a:srgbClr val="FFFFFF"/>
+                </a:solidFill>
+                <a:latin typeface="IBM Plex Sans"/>
+              </a:rPr>
+              <a:t>Erw. CHF 12'700</a:t>
+            </a:r>
+          </a:p>
+        </p:txBody>
+      </p:sp>
+      <p:sp>
+        <p:nvSpPr>
+          <p:cNvPr id="38" name="TextBox 37"/>
+          <p:cNvSpPr txBox="1"/>
+          <p:nvPr/>
+        </p:nvSpPr>
+        <p:spPr>
+          <a:xfrm>
+            <a:off x="429768" y="6089904"/>
+            <a:ext cx="10881360" cy="228600"/>
+          </a:xfrm>
+          <a:prstGeom prst="rect">
+            <a:avLst/>
+          </a:prstGeom>
+          <a:noFill/>
+        </p:spPr>
+        <p:txBody>
+          <a:bodyPr wrap="square" lIns="0" rIns="0" tIns="0" bIns="0" anchor="t">
+            <a:spAutoFit/>
+          </a:bodyPr>
+          <a:lstStyle/>
+          <a:p>
+            <a:pPr algn="l">
+              <a:lnSpc>
+                <a:spcPct val="105000"/>
+              </a:lnSpc>
+              <a:spcBef>
+                <a:spcPts val="0"/>
+              </a:spcBef>
+              <a:spcAft>
+                <a:spcPts val="0"/>
+              </a:spcAft>
+            </a:pPr>
+            <a:r>
+              <a:rPr sz="850" b="0">
+                <a:solidFill>
+                  <a:srgbClr val="58595B"/>
+                </a:solidFill>
+                <a:latin typeface="IBM Plex Sans"/>
+              </a:rPr>
+              <a:t>56 Anlässe 2026/27 im Excel-Blatt «Events 2027». Unter CHF 50'000 und daher nur dort: Winter-Sport 2026/27, Schwing- und Volksfeste 2027.</a:t>
+            </a:r>
+          </a:p>
+        </p:txBody>
+      </p:sp>
+    </p:spTree>
+  </p:cSld>
+  <p:clrMapOvr>
+    <a:masterClrMapping/>
+  </p:clrMapOvr>
+</p:sld>
+</file>
+
+<file path=ppt/slides/slide14.xml><?xml version="1.0" encoding="utf-8"?>
+<p:sld xmlns:a="http://schemas.openxmlformats.org/drawingml/2006/main" xmlns:p="http://schemas.openxmlformats.org/presentationml/2006/main" xmlns:r="http://schemas.openxmlformats.org/officeDocument/2006/relationships">
+  <p:cSld>
+    <p:spTree>
+      <p:nvGrpSpPr>
+        <p:cNvPr id="1" name=""/>
+        <p:cNvGrpSpPr/>
+        <p:nvPr/>
+      </p:nvGrpSpPr>
+      <p:grpSpPr/>
+      <p:sp>
+        <p:nvSpPr>
+          <p:cNvPr id="2" name="TextBox 1"/>
+          <p:cNvSpPr txBox="1"/>
+          <p:nvPr/>
+        </p:nvSpPr>
+        <p:spPr>
+          <a:xfrm>
+            <a:off x="1591056" y="365760"/>
+            <a:ext cx="8183879" cy="274320"/>
+          </a:xfrm>
+          <a:prstGeom prst="rect">
+            <a:avLst/>
+          </a:prstGeom>
+          <a:noFill/>
+        </p:spPr>
+        <p:txBody>
+          <a:bodyPr wrap="square" lIns="0" rIns="0" tIns="0" bIns="0" anchor="t">
+            <a:spAutoFit/>
+          </a:bodyPr>
+          <a:lstStyle/>
+          <a:p>
+            <a:pPr algn="l"/>
+            <a:r>
+              <a:rPr sz="1050" b="1" spc="160" cap="all">
+                <a:solidFill>
+                  <a:srgbClr val="E00036"/>
+                </a:solidFill>
+                <a:latin typeface="IBM Plex Sans"/>
+              </a:rPr>
+              <a:t>13 · Wettbewerb</a:t>
             </a:r>
           </a:p>
         </p:txBody>
@@ -12107,7 +14613,7 @@
                 </a:solidFill>
                 <a:latin typeface="IBM Plex Sans"/>
               </a:rPr>
-              <a:t>13</a:t>
+              <a:t>14</a:t>
             </a:r>
           </a:p>
         </p:txBody>
@@ -12686,7 +15192,7 @@
 </p:sld>
 </file>
 
-<file path=ppt/slides/slide14.xml><?xml version="1.0" encoding="utf-8"?>
+<file path=ppt/slides/slide15.xml><?xml version="1.0" encoding="utf-8"?>
 <p:sld xmlns:a="http://schemas.openxmlformats.org/drawingml/2006/main" xmlns:p="http://schemas.openxmlformats.org/presentationml/2006/main" xmlns:r="http://schemas.openxmlformats.org/officeDocument/2006/relationships">
   <p:cSld>
     <p:spTree>
@@ -12726,7 +15232,7 @@
                 </a:solidFill>
                 <a:latin typeface="IBM Plex Sans"/>
               </a:rPr>
-              <a:t>13 · Die nächsten 90 Tage</a:t>
+              <a:t>14 · Die nächsten 90 Tage</a:t>
             </a:r>
           </a:p>
         </p:txBody>
@@ -12879,7 +15385,7 @@
                 </a:solidFill>
                 <a:latin typeface="IBM Plex Sans"/>
               </a:rPr>
-              <a:t>14</a:t>
+              <a:t>15</a:t>
             </a:r>
           </a:p>
         </p:txBody>
@@ -13078,7 +15584,7 @@
                 </a:solidFill>
                 <a:latin typeface="IBM Plex Sans"/>
               </a:rPr>
-              <a:t>Commissioning- und Umzugstermine klären.</a:t>
+              <a:t>UW Laax, Bellevue Noël, Winter-Weltcups.</a:t>
             </a:r>
           </a:p>
         </p:txBody>
@@ -13211,7 +15717,7 @@
                 </a:solidFill>
                 <a:latin typeface="IBM Plex Sans"/>
               </a:rPr>
-              <a:t>Rahmengespräche Burkhalter, VINCI, Equans.</a:t>
+              <a:t>Rahmen Burkhalter, VINCI, Equans.</a:t>
             </a:r>
           </a:p>
           <a:p>
@@ -13233,7 +15739,7 @@
                 </a:solidFill>
                 <a:latin typeface="IBM Plex Sans"/>
               </a:rPr>
-              <a:t>WEF-Offerte abgeben.</a:t>
+              <a:t>WEF-Offerte, Galmiz, GETEC-Lastbank.</a:t>
             </a:r>
           </a:p>
         </p:txBody>
@@ -13639,7 +16145,7 @@
 </p:sld>
 </file>
 
-<file path=ppt/slides/slide15.xml><?xml version="1.0" encoding="utf-8"?>
+<file path=ppt/slides/slide16.xml><?xml version="1.0" encoding="utf-8"?>
 <p:sld xmlns:a="http://schemas.openxmlformats.org/drawingml/2006/main" xmlns:p="http://schemas.openxmlformats.org/presentationml/2006/main" xmlns:r="http://schemas.openxmlformats.org/officeDocument/2006/relationships">
   <p:cSld>
     <p:spTree>
@@ -13832,7 +16338,7 @@
                 </a:solidFill>
                 <a:latin typeface="IBM Plex Sans"/>
               </a:rPr>
-              <a:t>15</a:t>
+              <a:t>16</a:t>
             </a:r>
           </a:p>
         </p:txBody>
@@ -15241,7 +17747,7 @@
 </p:sld>
 </file>
 
-<file path=ppt/slides/slide16.xml><?xml version="1.0" encoding="utf-8"?>
+<file path=ppt/slides/slide17.xml><?xml version="1.0" encoding="utf-8"?>
 <p:sld xmlns:a="http://schemas.openxmlformats.org/drawingml/2006/main" xmlns:p="http://schemas.openxmlformats.org/presentationml/2006/main" xmlns:r="http://schemas.openxmlformats.org/officeDocument/2006/relationships">
   <p:cSld>
     <p:spTree>
@@ -15567,7 +18073,7 @@
                 </a:solidFill>
                 <a:latin typeface="Alata"/>
               </a:rPr>
-              <a:t>38 Projekte, 0,74 Mio. CHF realistisch</a:t>
+              <a:t>52 Projekte, 0,90 Mio. CHF realistisch</a:t>
             </a:r>
           </a:p>
         </p:txBody>
@@ -15764,7 +18270,7 @@
                 </a:solidFill>
                 <a:latin typeface="Alata"/>
               </a:rPr>
-              <a:t>38</a:t>
+              <a:t>52</a:t>
             </a:r>
           </a:p>
         </p:txBody>
@@ -15886,7 +18392,7 @@
                 </a:solidFill>
                 <a:latin typeface="Alata"/>
               </a:rPr>
-              <a:t>5,3</a:t>
+              <a:t>6,6</a:t>
             </a:r>
           </a:p>
         </p:txBody>
@@ -16008,7 +18514,7 @@
                 </a:solidFill>
                 <a:latin typeface="Alata"/>
               </a:rPr>
-              <a:t>0,74</a:t>
+              <a:t>0,90</a:t>
             </a:r>
           </a:p>
         </p:txBody>
@@ -16252,7 +18758,7 @@
                 </a:solidFill>
                 <a:latin typeface="Alata"/>
               </a:rPr>
-              <a:t>9</a:t>
+              <a:t>10</a:t>
             </a:r>
           </a:p>
         </p:txBody>
@@ -22119,7 +24625,7 @@
                 </a:solidFill>
                 <a:latin typeface="IBM Plex Sans"/>
               </a:rPr>
-              <a:t>Netz / Unterwerk</a:t>
+              <a:t>Netz / Energie</a:t>
             </a:r>
           </a:p>
         </p:txBody>
